--- a/courses/build/ai-literacy/A-D2.pptx
+++ b/courses/build/ai-literacy/A-D2.pptx
@@ -5394,7 +5394,7 @@
     <p:bg>
       <p:bgPr>
         <a:solidFill>
-          <a:srgbClr val="F7F2E9"/>
+          <a:srgbClr val="FFFFFF"/>
         </a:solidFill>
         <a:effectLst/>
       </p:bgPr>
@@ -5436,9 +5436,9 @@
             <a:r>
               <a:rPr sz="1000" b="0">
                 <a:solidFill>
-                  <a:srgbClr val="6B6255"/>
-                </a:solidFill>
-                <a:latin typeface="Arial"/>
+                  <a:srgbClr val="111111"/>
+                </a:solidFill>
+                <a:latin typeface="Verdana"/>
               </a:rPr>
               <a:t>A-D2-01   ·   Poster A-P05</a:t>
             </a:r>
@@ -5475,9 +5475,9 @@
             <a:r>
               <a:rPr sz="1000" b="0">
                 <a:solidFill>
-                  <a:srgbClr val="6B6255"/>
-                </a:solidFill>
-                <a:latin typeface="Arial"/>
+                  <a:srgbClr val="111111"/>
+                </a:solidFill>
+                <a:latin typeface="Verdana"/>
               </a:rPr>
               <a:t>AI Literacy</a:t>
             </a:r>
@@ -5514,9 +5514,9 @@
             <a:r>
               <a:rPr sz="3800" b="1">
                 <a:solidFill>
-                  <a:srgbClr val="1F4D2B"/>
-                </a:solidFill>
-                <a:latin typeface="Georgia"/>
+                  <a:srgbClr val="111111"/>
+                </a:solidFill>
+                <a:latin typeface="Impact"/>
               </a:rPr>
               <a:t>Welcome back</a:t>
             </a:r>
@@ -5538,7 +5538,7 @@
             <a:avLst/>
           </a:prstGeom>
           <a:solidFill>
-            <a:srgbClr val="E2D8C4"/>
+            <a:srgbClr val="D6336C"/>
           </a:solidFill>
           <a:ln>
             <a:noFill/>
@@ -5597,9 +5597,9 @@
             <a:r>
               <a:rPr sz="2800" b="0">
                 <a:solidFill>
-                  <a:srgbClr val="20190F"/>
-                </a:solidFill>
-                <a:latin typeface="Arial"/>
+                  <a:srgbClr val="111111"/>
+                </a:solidFill>
+                <a:latin typeface="Verdana"/>
               </a:rPr>
               <a:t>•  Day 2 of 2</a:t>
             </a:r>
@@ -5613,9 +5613,9 @@
             <a:r>
               <a:rPr sz="2800" b="0">
                 <a:solidFill>
-                  <a:srgbClr val="20190F"/>
-                </a:solidFill>
-                <a:latin typeface="Arial"/>
+                  <a:srgbClr val="111111"/>
+                </a:solidFill>
+                <a:latin typeface="Verdana"/>
               </a:rPr>
               <a:t>•  Check before you trust</a:t>
             </a:r>
@@ -5629,9 +5629,9 @@
             <a:r>
               <a:rPr sz="2800" b="0">
                 <a:solidFill>
-                  <a:srgbClr val="20190F"/>
-                </a:solidFill>
-                <a:latin typeface="Arial"/>
+                  <a:srgbClr val="111111"/>
+                </a:solidFill>
+                <a:latin typeface="Verdana"/>
               </a:rPr>
               <a:t>•  Two truths and an AI lie</a:t>
             </a:r>
@@ -5653,11 +5653,11 @@
             <a:avLst/>
           </a:prstGeom>
           <a:solidFill>
-            <a:srgbClr val="FBF6EC"/>
+            <a:srgbClr val="FFFFFF"/>
           </a:solidFill>
           <a:ln w="15875">
             <a:solidFill>
-              <a:srgbClr val="E2D8C4"/>
+              <a:srgbClr val="D6336C"/>
             </a:solidFill>
           </a:ln>
           <a:effectLst/>
@@ -5714,9 +5714,9 @@
             <a:r>
               <a:rPr sz="1200" b="1">
                 <a:solidFill>
-                  <a:srgbClr val="C07A1E"/>
-                </a:solidFill>
-                <a:latin typeface="Arial"/>
+                  <a:srgbClr val="1FA3C8"/>
+                </a:solidFill>
+                <a:latin typeface="Verdana"/>
               </a:rPr>
               <a:t>IMAGE · A-IMG-01 · coming</a:t>
             </a:r>
@@ -5753,9 +5753,9 @@
             <a:r>
               <a:rPr sz="1800" b="1">
                 <a:solidFill>
-                  <a:srgbClr val="1F4D2B"/>
-                </a:solidFill>
-                <a:latin typeface="Georgia"/>
+                  <a:srgbClr val="111111"/>
+                </a:solidFill>
+                <a:latin typeface="Impact"/>
               </a:rPr>
               <a:t>Learning together under a tree</a:t>
             </a:r>
@@ -5792,9 +5792,9 @@
             <a:r>
               <a:rPr sz="1100" b="0">
                 <a:solidFill>
-                  <a:srgbClr val="20190F"/>
-                </a:solidFill>
-                <a:latin typeface="Arial"/>
+                  <a:srgbClr val="111111"/>
+                </a:solidFill>
+                <a:latin typeface="Verdana"/>
               </a:rPr>
               <a:t>Landscape 16:9. A group of five learners on plastic chairs under a big shade tree near a small community garden: a gogo, an older man in a hat, two young women, a young man. One phone is shared between the gogo and a young woman; the young woman points at the screen, the gogo laughs. The others lean in. A poster on a fence behind (plain shapes, no text).…</a:t>
             </a:r>
@@ -5815,7 +5815,7 @@
     <p:bg>
       <p:bgPr>
         <a:solidFill>
-          <a:srgbClr val="F7F2E9"/>
+          <a:srgbClr val="FFFFFF"/>
         </a:solidFill>
         <a:effectLst/>
       </p:bgPr>
@@ -5857,9 +5857,9 @@
             <a:r>
               <a:rPr sz="1000" b="0">
                 <a:solidFill>
-                  <a:srgbClr val="6B6255"/>
-                </a:solidFill>
-                <a:latin typeface="Arial"/>
+                  <a:srgbClr val="111111"/>
+                </a:solidFill>
+                <a:latin typeface="Verdana"/>
               </a:rPr>
               <a:t>A-D2-10   ·   Poster A-P09</a:t>
             </a:r>
@@ -5896,9 +5896,9 @@
             <a:r>
               <a:rPr sz="1000" b="0">
                 <a:solidFill>
-                  <a:srgbClr val="6B6255"/>
-                </a:solidFill>
-                <a:latin typeface="Arial"/>
+                  <a:srgbClr val="111111"/>
+                </a:solidFill>
+                <a:latin typeface="Verdana"/>
               </a:rPr>
               <a:t>AI Literacy</a:t>
             </a:r>
@@ -5920,7 +5920,7 @@
             <a:avLst/>
           </a:prstGeom>
           <a:solidFill>
-            <a:srgbClr val="C07A1E"/>
+            <a:srgbClr val="1FA3C8"/>
           </a:solidFill>
           <a:ln>
             <a:noFill/>
@@ -5979,9 +5979,9 @@
             <a:r>
               <a:rPr sz="1400" b="1">
                 <a:solidFill>
-                  <a:srgbClr val="F7F2E9"/>
-                </a:solidFill>
-                <a:latin typeface="Arial"/>
+                  <a:srgbClr val="FFFFFF"/>
+                </a:solidFill>
+                <a:latin typeface="Verdana"/>
               </a:rPr>
               <a:t>YOUR TURN</a:t>
             </a:r>
@@ -6018,9 +6018,9 @@
             <a:r>
               <a:rPr sz="3800" b="1">
                 <a:solidFill>
-                  <a:srgbClr val="1F4D2B"/>
-                </a:solidFill>
-                <a:latin typeface="Georgia"/>
+                  <a:srgbClr val="111111"/>
+                </a:solidFill>
+                <a:latin typeface="Impact"/>
               </a:rPr>
               <a:t>Lock your WhatsApp</a:t>
             </a:r>
@@ -6042,7 +6042,7 @@
             <a:avLst/>
           </a:prstGeom>
           <a:solidFill>
-            <a:srgbClr val="E2D8C4"/>
+            <a:srgbClr val="D6336C"/>
           </a:solidFill>
           <a:ln>
             <a:noFill/>
@@ -6101,9 +6101,9 @@
             <a:r>
               <a:rPr sz="3000" b="1">
                 <a:solidFill>
-                  <a:srgbClr val="20190F"/>
-                </a:solidFill>
-                <a:latin typeface="Arial"/>
+                  <a:srgbClr val="111111"/>
+                </a:solidFill>
+                <a:latin typeface="Verdana"/>
               </a:rPr>
               <a:t>•  Two-step verification: on</a:t>
             </a:r>
@@ -6117,9 +6117,9 @@
             <a:r>
               <a:rPr sz="3000" b="1">
                 <a:solidFill>
-                  <a:srgbClr val="20190F"/>
-                </a:solidFill>
-                <a:latin typeface="Arial"/>
+                  <a:srgbClr val="111111"/>
+                </a:solidFill>
+                <a:latin typeface="Verdana"/>
               </a:rPr>
               <a:t>•  Groups and photo: My contacts</a:t>
             </a:r>
@@ -6133,9 +6133,9 @@
             <a:r>
               <a:rPr sz="3000" b="1">
                 <a:solidFill>
-                  <a:srgbClr val="20190F"/>
-                </a:solidFill>
-                <a:latin typeface="Arial"/>
+                  <a:srgbClr val="111111"/>
+                </a:solidFill>
+                <a:latin typeface="Verdana"/>
               </a:rPr>
               <a:t>•  Never send the code</a:t>
             </a:r>
@@ -6157,11 +6157,11 @@
             <a:avLst/>
           </a:prstGeom>
           <a:solidFill>
-            <a:srgbClr val="FBF6EC"/>
+            <a:srgbClr val="FFFFFF"/>
           </a:solidFill>
           <a:ln w="15875">
             <a:solidFill>
-              <a:srgbClr val="E2D8C4"/>
+              <a:srgbClr val="D6336C"/>
             </a:solidFill>
           </a:ln>
           <a:effectLst/>
@@ -6218,9 +6218,9 @@
             <a:r>
               <a:rPr sz="1200" b="1">
                 <a:solidFill>
-                  <a:srgbClr val="C07A1E"/>
-                </a:solidFill>
-                <a:latin typeface="Arial"/>
+                  <a:srgbClr val="1FA3C8"/>
+                </a:solidFill>
+                <a:latin typeface="Verdana"/>
               </a:rPr>
               <a:t>IMAGE · A-IMG-07 · coming</a:t>
             </a:r>
@@ -6257,9 +6257,9 @@
             <a:r>
               <a:rPr sz="1800" b="1">
                 <a:solidFill>
-                  <a:srgbClr val="1F4D2B"/>
-                </a:solidFill>
-                <a:latin typeface="Georgia"/>
+                  <a:srgbClr val="111111"/>
+                </a:solidFill>
+                <a:latin typeface="Impact"/>
               </a:rPr>
               <a:t>Lock your chats</a:t>
             </a:r>
@@ -6296,9 +6296,9 @@
             <a:r>
               <a:rPr sz="1100" b="0">
                 <a:solidFill>
-                  <a:srgbClr val="20190F"/>
-                </a:solidFill>
-                <a:latin typeface="Arial"/>
+                  <a:srgbClr val="111111"/>
+                </a:solidFill>
+                <a:latin typeface="Verdana"/>
               </a:rPr>
               <a:t>Close-up of two hands (an elder's and a youth's) around an entry-level phone. On the screen: a large padlock over six empty PIN dots, and a toggle switched on. Background soft-focus garden. No real app interface or logo.</a:t>
             </a:r>
@@ -6319,7 +6319,7 @@
     <p:bg>
       <p:bgPr>
         <a:solidFill>
-          <a:srgbClr val="F7F2E9"/>
+          <a:srgbClr val="FFFFFF"/>
         </a:solidFill>
         <a:effectLst/>
       </p:bgPr>
@@ -6361,9 +6361,9 @@
             <a:r>
               <a:rPr sz="1000" b="0">
                 <a:solidFill>
-                  <a:srgbClr val="6B6255"/>
-                </a:solidFill>
-                <a:latin typeface="Arial"/>
+                  <a:srgbClr val="111111"/>
+                </a:solidFill>
+                <a:latin typeface="Verdana"/>
               </a:rPr>
               <a:t>A-D2-11   ·   Poster A-P10</a:t>
             </a:r>
@@ -6400,9 +6400,9 @@
             <a:r>
               <a:rPr sz="1000" b="0">
                 <a:solidFill>
-                  <a:srgbClr val="6B6255"/>
-                </a:solidFill>
-                <a:latin typeface="Arial"/>
+                  <a:srgbClr val="111111"/>
+                </a:solidFill>
+                <a:latin typeface="Verdana"/>
               </a:rPr>
               <a:t>AI Literacy</a:t>
             </a:r>
@@ -6439,9 +6439,9 @@
             <a:r>
               <a:rPr sz="3800" b="1">
                 <a:solidFill>
-                  <a:srgbClr val="1F4D2B"/>
-                </a:solidFill>
-                <a:latin typeface="Georgia"/>
+                  <a:srgbClr val="111111"/>
+                </a:solidFill>
+                <a:latin typeface="Impact"/>
               </a:rPr>
               <a:t>Stop · Check · Ask</a:t>
             </a:r>
@@ -6463,7 +6463,7 @@
             <a:avLst/>
           </a:prstGeom>
           <a:solidFill>
-            <a:srgbClr val="E2D8C4"/>
+            <a:srgbClr val="D6336C"/>
           </a:solidFill>
           <a:ln>
             <a:noFill/>
@@ -6522,9 +6522,9 @@
             <a:r>
               <a:rPr sz="2400" b="0">
                 <a:solidFill>
-                  <a:srgbClr val="20190F"/>
-                </a:solidFill>
-                <a:latin typeface="Arial"/>
+                  <a:srgbClr val="111111"/>
+                </a:solidFill>
+                <a:latin typeface="Verdana"/>
               </a:rPr>
               <a:t>•  STOP — don't click, pay, send</a:t>
             </a:r>
@@ -6538,9 +6538,9 @@
             <a:r>
               <a:rPr sz="2400" b="0">
                 <a:solidFill>
-                  <a:srgbClr val="20190F"/>
-                </a:solidFill>
-                <a:latin typeface="Arial"/>
+                  <a:srgbClr val="111111"/>
+                </a:solidFill>
+                <a:latin typeface="Verdana"/>
               </a:rPr>
               <a:t>•  CHECK — call the number you know</a:t>
             </a:r>
@@ -6554,9 +6554,9 @@
             <a:r>
               <a:rPr sz="2400" b="0">
                 <a:solidFill>
-                  <a:srgbClr val="20190F"/>
-                </a:solidFill>
-                <a:latin typeface="Arial"/>
+                  <a:srgbClr val="111111"/>
+                </a:solidFill>
+                <a:latin typeface="Verdana"/>
               </a:rPr>
               <a:t>•  ASK — someone you trust</a:t>
             </a:r>
@@ -6578,11 +6578,11 @@
             <a:avLst/>
           </a:prstGeom>
           <a:solidFill>
-            <a:srgbClr val="FBF6EC"/>
+            <a:srgbClr val="FFFFFF"/>
           </a:solidFill>
           <a:ln w="15875">
             <a:solidFill>
-              <a:srgbClr val="E2D8C4"/>
+              <a:srgbClr val="D6336C"/>
             </a:solidFill>
           </a:ln>
           <a:effectLst/>
@@ -6639,9 +6639,9 @@
             <a:r>
               <a:rPr sz="1200" b="1">
                 <a:solidFill>
-                  <a:srgbClr val="C07A1E"/>
-                </a:solidFill>
-                <a:latin typeface="Arial"/>
+                  <a:srgbClr val="1FA3C8"/>
+                </a:solidFill>
+                <a:latin typeface="Verdana"/>
               </a:rPr>
               <a:t>POSTER ART · A-P10-ART · coming</a:t>
             </a:r>
@@ -6678,9 +6678,9 @@
             <a:r>
               <a:rPr sz="1800" b="1">
                 <a:solidFill>
-                  <a:srgbClr val="1F4D2B"/>
-                </a:solidFill>
-                <a:latin typeface="Georgia"/>
+                  <a:srgbClr val="111111"/>
+                </a:solidFill>
+                <a:latin typeface="Impact"/>
               </a:rPr>
               <a:t>Artwork for A-P10 · Stop · Check · Ask</a:t>
             </a:r>
@@ -6717,9 +6717,9 @@
             <a:r>
               <a:rPr sz="1100" b="0">
                 <a:solidFill>
-                  <a:srgbClr val="20190F"/>
-                </a:solidFill>
-                <a:latin typeface="Arial"/>
+                  <a:srgbClr val="111111"/>
+                </a:solidFill>
+                <a:latin typeface="Verdana"/>
               </a:rPr>
               <a:t>Three big panels side by side, like three steps on a path. ① STOP: a hand held up flat in front of a phone showing a message bubble with an exclamation mark and a clock (hurry). ② CHECK: the same person (young man, cap) phoning on a different, older contact — a phone book page with a familiar face drawn on it. ③ ASK: the young man talking with an older…</a:t>
             </a:r>
@@ -6740,7 +6740,7 @@
     <p:bg>
       <p:bgPr>
         <a:solidFill>
-          <a:srgbClr val="F7F2E9"/>
+          <a:srgbClr val="FFFFFF"/>
         </a:solidFill>
         <a:effectLst/>
       </p:bgPr>
@@ -6782,9 +6782,9 @@
             <a:r>
               <a:rPr sz="1000" b="0">
                 <a:solidFill>
-                  <a:srgbClr val="6B6255"/>
-                </a:solidFill>
-                <a:latin typeface="Arial"/>
+                  <a:srgbClr val="111111"/>
+                </a:solidFill>
+                <a:latin typeface="Verdana"/>
               </a:rPr>
               <a:t>A-D2-12   ·   Poster A-P10</a:t>
             </a:r>
@@ -6821,9 +6821,9 @@
             <a:r>
               <a:rPr sz="1000" b="0">
                 <a:solidFill>
-                  <a:srgbClr val="6B6255"/>
-                </a:solidFill>
-                <a:latin typeface="Arial"/>
+                  <a:srgbClr val="111111"/>
+                </a:solidFill>
+                <a:latin typeface="Verdana"/>
               </a:rPr>
               <a:t>AI Literacy</a:t>
             </a:r>
@@ -6845,7 +6845,7 @@
             <a:avLst/>
           </a:prstGeom>
           <a:solidFill>
-            <a:srgbClr val="C07A1E"/>
+            <a:srgbClr val="1FA3C8"/>
           </a:solidFill>
           <a:ln>
             <a:noFill/>
@@ -6904,9 +6904,9 @@
             <a:r>
               <a:rPr sz="1400" b="1">
                 <a:solidFill>
-                  <a:srgbClr val="F7F2E9"/>
-                </a:solidFill>
-                <a:latin typeface="Arial"/>
+                  <a:srgbClr val="FFFFFF"/>
+                </a:solidFill>
+                <a:latin typeface="Verdana"/>
               </a:rPr>
               <a:t>YOUR TURN</a:t>
             </a:r>
@@ -6943,9 +6943,9 @@
             <a:r>
               <a:rPr sz="3800" b="1">
                 <a:solidFill>
-                  <a:srgbClr val="1F4D2B"/>
-                </a:solidFill>
-                <a:latin typeface="Georgia"/>
+                  <a:srgbClr val="111111"/>
+                </a:solidFill>
+                <a:latin typeface="Impact"/>
               </a:rPr>
               <a:t>Scam or real?</a:t>
             </a:r>
@@ -6967,7 +6967,7 @@
             <a:avLst/>
           </a:prstGeom>
           <a:solidFill>
-            <a:srgbClr val="E2D8C4"/>
+            <a:srgbClr val="D6336C"/>
           </a:solidFill>
           <a:ln>
             <a:noFill/>
@@ -7026,9 +7026,9 @@
             <a:r>
               <a:rPr sz="3000" b="1">
                 <a:solidFill>
-                  <a:srgbClr val="20190F"/>
-                </a:solidFill>
-                <a:latin typeface="Arial"/>
+                  <a:srgbClr val="111111"/>
+                </a:solidFill>
+                <a:latin typeface="Verdana"/>
               </a:rPr>
               <a:t>•  10 message cards</a:t>
             </a:r>
@@ -7042,9 +7042,9 @@
             <a:r>
               <a:rPr sz="3000" b="1">
                 <a:solidFill>
-                  <a:srgbClr val="20190F"/>
-                </a:solidFill>
-                <a:latin typeface="Arial"/>
+                  <a:srgbClr val="111111"/>
+                </a:solidFill>
+                <a:latin typeface="Verdana"/>
               </a:rPr>
               <a:t>•  Scam · Real · Not sure — check</a:t>
             </a:r>
@@ -7058,9 +7058,9 @@
             <a:r>
               <a:rPr sz="3000" b="1">
                 <a:solidFill>
-                  <a:srgbClr val="20190F"/>
-                </a:solidFill>
-                <a:latin typeface="Arial"/>
+                  <a:srgbClr val="111111"/>
+                </a:solidFill>
+                <a:latin typeface="Verdana"/>
               </a:rPr>
               <a:t>•  Name the warning sign</a:t>
             </a:r>
@@ -7082,11 +7082,11 @@
             <a:avLst/>
           </a:prstGeom>
           <a:solidFill>
-            <a:srgbClr val="FBF6EC"/>
+            <a:srgbClr val="FFFFFF"/>
           </a:solidFill>
           <a:ln w="15875">
             <a:solidFill>
-              <a:srgbClr val="E2D8C4"/>
+              <a:srgbClr val="D6336C"/>
             </a:solidFill>
           </a:ln>
           <a:effectLst/>
@@ -7143,9 +7143,9 @@
             <a:r>
               <a:rPr sz="1200" b="1">
                 <a:solidFill>
-                  <a:srgbClr val="C07A1E"/>
-                </a:solidFill>
-                <a:latin typeface="Arial"/>
+                  <a:srgbClr val="1FA3C8"/>
+                </a:solidFill>
+                <a:latin typeface="Verdana"/>
               </a:rPr>
               <a:t>POSTER ART · A-P10-ART · coming</a:t>
             </a:r>
@@ -7182,9 +7182,9 @@
             <a:r>
               <a:rPr sz="1800" b="1">
                 <a:solidFill>
-                  <a:srgbClr val="1F4D2B"/>
-                </a:solidFill>
-                <a:latin typeface="Georgia"/>
+                  <a:srgbClr val="111111"/>
+                </a:solidFill>
+                <a:latin typeface="Impact"/>
               </a:rPr>
               <a:t>Artwork for A-P10 · Stop · Check · Ask</a:t>
             </a:r>
@@ -7221,9 +7221,9 @@
             <a:r>
               <a:rPr sz="1100" b="0">
                 <a:solidFill>
-                  <a:srgbClr val="20190F"/>
-                </a:solidFill>
-                <a:latin typeface="Arial"/>
+                  <a:srgbClr val="111111"/>
+                </a:solidFill>
+                <a:latin typeface="Verdana"/>
               </a:rPr>
               <a:t>Three big panels side by side, like three steps on a path. ① STOP: a hand held up flat in front of a phone showing a message bubble with an exclamation mark and a clock (hurry). ② CHECK: the same person (young man, cap) phoning on a different, older contact — a phone book page with a familiar face drawn on it. ③ ASK: the young man talking with an older…</a:t>
             </a:r>
@@ -7244,7 +7244,7 @@
     <p:bg>
       <p:bgPr>
         <a:solidFill>
-          <a:srgbClr val="F7F2E9"/>
+          <a:srgbClr val="FFFFFF"/>
         </a:solidFill>
         <a:effectLst/>
       </p:bgPr>
@@ -7286,9 +7286,9 @@
             <a:r>
               <a:rPr sz="1000" b="0">
                 <a:solidFill>
-                  <a:srgbClr val="6B6255"/>
-                </a:solidFill>
-                <a:latin typeface="Arial"/>
+                  <a:srgbClr val="111111"/>
+                </a:solidFill>
+                <a:latin typeface="Verdana"/>
               </a:rPr>
               <a:t>A-D2-13   ·   Poster A-P11</a:t>
             </a:r>
@@ -7325,9 +7325,9 @@
             <a:r>
               <a:rPr sz="1000" b="0">
                 <a:solidFill>
-                  <a:srgbClr val="6B6255"/>
-                </a:solidFill>
-                <a:latin typeface="Arial"/>
+                  <a:srgbClr val="111111"/>
+                </a:solidFill>
+                <a:latin typeface="Verdana"/>
               </a:rPr>
               <a:t>AI Literacy</a:t>
             </a:r>
@@ -7364,9 +7364,9 @@
             <a:r>
               <a:rPr sz="3800" b="1">
                 <a:solidFill>
-                  <a:srgbClr val="1F4D2B"/>
-                </a:solidFill>
-                <a:latin typeface="Georgia"/>
+                  <a:srgbClr val="111111"/>
+                </a:solidFill>
+                <a:latin typeface="Impact"/>
               </a:rPr>
               <a:t>Voices and videos can lie</a:t>
             </a:r>
@@ -7388,7 +7388,7 @@
             <a:avLst/>
           </a:prstGeom>
           <a:solidFill>
-            <a:srgbClr val="E2D8C4"/>
+            <a:srgbClr val="D6336C"/>
           </a:solidFill>
           <a:ln>
             <a:noFill/>
@@ -7447,9 +7447,9 @@
             <a:r>
               <a:rPr sz="2400" b="0">
                 <a:solidFill>
-                  <a:srgbClr val="20190F"/>
-                </a:solidFill>
-                <a:latin typeface="Arial"/>
+                  <a:srgbClr val="111111"/>
+                </a:solidFill>
+                <a:latin typeface="Verdana"/>
               </a:rPr>
               <a:t>•  A voice can be copied</a:t>
             </a:r>
@@ -7463,9 +7463,9 @@
             <a:r>
               <a:rPr sz="2400" b="0">
                 <a:solidFill>
-                  <a:srgbClr val="20190F"/>
-                </a:solidFill>
-                <a:latin typeface="Arial"/>
+                  <a:srgbClr val="111111"/>
+                </a:solidFill>
+                <a:latin typeface="Verdana"/>
               </a:rPr>
               <a:t>•  A famous face can be faked</a:t>
             </a:r>
@@ -7479,9 +7479,9 @@
             <a:r>
               <a:rPr sz="2400" b="0">
                 <a:solidFill>
-                  <a:srgbClr val="20190F"/>
-                </a:solidFill>
-                <a:latin typeface="Arial"/>
+                  <a:srgbClr val="111111"/>
+                </a:solidFill>
+                <a:latin typeface="Verdana"/>
               </a:rPr>
               <a:t>•  Check the message, not the picture</a:t>
             </a:r>
@@ -7503,11 +7503,11 @@
             <a:avLst/>
           </a:prstGeom>
           <a:solidFill>
-            <a:srgbClr val="FBF6EC"/>
+            <a:srgbClr val="FFFFFF"/>
           </a:solidFill>
           <a:ln w="15875">
             <a:solidFill>
-              <a:srgbClr val="E2D8C4"/>
+              <a:srgbClr val="D6336C"/>
             </a:solidFill>
           </a:ln>
           <a:effectLst/>
@@ -7564,9 +7564,9 @@
             <a:r>
               <a:rPr sz="1200" b="1">
                 <a:solidFill>
-                  <a:srgbClr val="C07A1E"/>
-                </a:solidFill>
-                <a:latin typeface="Arial"/>
+                  <a:srgbClr val="1FA3C8"/>
+                </a:solidFill>
+                <a:latin typeface="Verdana"/>
               </a:rPr>
               <a:t>POSTER ART · A-P11-ART · coming</a:t>
             </a:r>
@@ -7603,9 +7603,9 @@
             <a:r>
               <a:rPr sz="1800" b="1">
                 <a:solidFill>
-                  <a:srgbClr val="1F4D2B"/>
-                </a:solidFill>
-                <a:latin typeface="Georgia"/>
+                  <a:srgbClr val="111111"/>
+                </a:solidFill>
+                <a:latin typeface="Impact"/>
               </a:rPr>
               <a:t>Artwork for A-P11 · Fake voices, fake videos</a:t>
             </a:r>
@@ -7642,9 +7642,9 @@
             <a:r>
               <a:rPr sz="1100" b="0">
                 <a:solidFill>
-                  <a:srgbClr val="20190F"/>
-                </a:solidFill>
-                <a:latin typeface="Arial"/>
+                  <a:srgbClr val="111111"/>
+                </a:solidFill>
+                <a:latin typeface="Verdana"/>
               </a:rPr>
               <a:t>Left: a phone playing a voice note (sound wave), and behind the phone a shadowy copying-machine shape producing a second identical sound wave. Centre: a video frame of a smiling man in a suit (generic, not a real person) with a pile of banknotes; the edge of his face slightly pixel-broken to hint "fake". Right: a family at home — a mother on the phone…</a:t>
             </a:r>
@@ -7665,7 +7665,7 @@
     <p:bg>
       <p:bgPr>
         <a:solidFill>
-          <a:srgbClr val="F7F2E9"/>
+          <a:srgbClr val="FFFFFF"/>
         </a:solidFill>
         <a:effectLst/>
       </p:bgPr>
@@ -7707,9 +7707,9 @@
             <a:r>
               <a:rPr sz="1000" b="0">
                 <a:solidFill>
-                  <a:srgbClr val="6B6255"/>
-                </a:solidFill>
-                <a:latin typeface="Arial"/>
+                  <a:srgbClr val="111111"/>
+                </a:solidFill>
+                <a:latin typeface="Verdana"/>
               </a:rPr>
               <a:t>A-D2-14   ·   Poster A-P11</a:t>
             </a:r>
@@ -7746,9 +7746,9 @@
             <a:r>
               <a:rPr sz="1000" b="0">
                 <a:solidFill>
-                  <a:srgbClr val="6B6255"/>
-                </a:solidFill>
-                <a:latin typeface="Arial"/>
+                  <a:srgbClr val="111111"/>
+                </a:solidFill>
+                <a:latin typeface="Verdana"/>
               </a:rPr>
               <a:t>AI Literacy</a:t>
             </a:r>
@@ -7770,7 +7770,7 @@
             <a:avLst/>
           </a:prstGeom>
           <a:solidFill>
-            <a:srgbClr val="C07A1E"/>
+            <a:srgbClr val="1FA3C8"/>
           </a:solidFill>
           <a:ln>
             <a:noFill/>
@@ -7829,9 +7829,9 @@
             <a:r>
               <a:rPr sz="1400" b="1">
                 <a:solidFill>
-                  <a:srgbClr val="F7F2E9"/>
-                </a:solidFill>
-                <a:latin typeface="Arial"/>
+                  <a:srgbClr val="FFFFFF"/>
+                </a:solidFill>
+                <a:latin typeface="Verdana"/>
               </a:rPr>
               <a:t>YOUR TURN</a:t>
             </a:r>
@@ -7868,9 +7868,9 @@
             <a:r>
               <a:rPr sz="3800" b="1">
                 <a:solidFill>
-                  <a:srgbClr val="1F4D2B"/>
-                </a:solidFill>
-                <a:latin typeface="Georgia"/>
+                  <a:srgbClr val="111111"/>
+                </a:solidFill>
+                <a:latin typeface="Impact"/>
               </a:rPr>
               <a:t>Family code word</a:t>
             </a:r>
@@ -7892,7 +7892,7 @@
             <a:avLst/>
           </a:prstGeom>
           <a:solidFill>
-            <a:srgbClr val="E2D8C4"/>
+            <a:srgbClr val="D6336C"/>
           </a:solidFill>
           <a:ln>
             <a:noFill/>
@@ -7951,9 +7951,9 @@
             <a:r>
               <a:rPr sz="2600" b="1">
                 <a:solidFill>
-                  <a:srgbClr val="20190F"/>
-                </a:solidFill>
-                <a:latin typeface="Arial"/>
+                  <a:srgbClr val="111111"/>
+                </a:solidFill>
+                <a:latin typeface="Verdana"/>
               </a:rPr>
               <a:t>•  Pairs: one "in trouble", one asks</a:t>
             </a:r>
@@ -7967,9 +7967,9 @@
             <a:r>
               <a:rPr sz="2600" b="1">
                 <a:solidFill>
-                  <a:srgbClr val="20190F"/>
-                </a:solidFill>
-                <a:latin typeface="Arial"/>
+                  <a:srgbClr val="111111"/>
+                </a:solidFill>
+                <a:latin typeface="Verdana"/>
               </a:rPr>
               <a:t>•  Agree it face to face</a:t>
             </a:r>
@@ -7983,9 +7983,9 @@
             <a:r>
               <a:rPr sz="2600" b="1">
                 <a:solidFill>
-                  <a:srgbClr val="20190F"/>
-                </a:solidFill>
-                <a:latin typeface="Arial"/>
+                  <a:srgbClr val="111111"/>
+                </a:solidFill>
+                <a:latin typeface="Verdana"/>
               </a:rPr>
               <a:t>•  Never write it down</a:t>
             </a:r>
@@ -8007,11 +8007,11 @@
             <a:avLst/>
           </a:prstGeom>
           <a:solidFill>
-            <a:srgbClr val="FBF6EC"/>
+            <a:srgbClr val="FFFFFF"/>
           </a:solidFill>
           <a:ln w="15875">
             <a:solidFill>
-              <a:srgbClr val="E2D8C4"/>
+              <a:srgbClr val="D6336C"/>
             </a:solidFill>
           </a:ln>
           <a:effectLst/>
@@ -8068,9 +8068,9 @@
             <a:r>
               <a:rPr sz="1200" b="1">
                 <a:solidFill>
-                  <a:srgbClr val="C07A1E"/>
-                </a:solidFill>
-                <a:latin typeface="Arial"/>
+                  <a:srgbClr val="1FA3C8"/>
+                </a:solidFill>
+                <a:latin typeface="Verdana"/>
               </a:rPr>
               <a:t>IMAGE · A-IMG-08 · coming</a:t>
             </a:r>
@@ -8107,9 +8107,9 @@
             <a:r>
               <a:rPr sz="1800" b="1">
                 <a:solidFill>
-                  <a:srgbClr val="1F4D2B"/>
-                </a:solidFill>
-                <a:latin typeface="Georgia"/>
+                  <a:srgbClr val="111111"/>
+                </a:solidFill>
+                <a:latin typeface="Impact"/>
               </a:rPr>
               <a:t>The family code word</a:t>
             </a:r>
@@ -8146,9 +8146,9 @@
             <a:r>
               <a:rPr sz="1100" b="0">
                 <a:solidFill>
-                  <a:srgbClr val="20190F"/>
-                </a:solidFill>
-                <a:latin typeface="Arial"/>
+                  <a:srgbClr val="111111"/>
+                </a:solidFill>
+                <a:latin typeface="Verdana"/>
               </a:rPr>
               <a:t>Landscape 16:9. Split scene: left, a mother in her kitchen listening to a voice note, eyebrow raised, finger to chin (thinking); right, the same mother and her adult son face to face on the stoep, both smiling, the son whispering something in her ear (agreeing the code word in person). A thin dotted line joins the two halves.</a:t>
             </a:r>
@@ -8169,7 +8169,7 @@
     <p:bg>
       <p:bgPr>
         <a:solidFill>
-          <a:srgbClr val="1F4D2B"/>
+          <a:srgbClr val="1B1F3B"/>
         </a:solidFill>
         <a:effectLst/>
       </p:bgPr>
@@ -8211,9 +8211,9 @@
             <a:r>
               <a:rPr sz="1000" b="0">
                 <a:solidFill>
-                  <a:srgbClr val="A8D88A"/>
-                </a:solidFill>
-                <a:latin typeface="Arial"/>
+                  <a:srgbClr val="F7C948"/>
+                </a:solidFill>
+                <a:latin typeface="Verdana"/>
               </a:rPr>
               <a:t>A-D2-15   ·   Poster A-P12</a:t>
             </a:r>
@@ -8250,9 +8250,9 @@
             <a:r>
               <a:rPr sz="1000" b="0">
                 <a:solidFill>
-                  <a:srgbClr val="A8D88A"/>
-                </a:solidFill>
-                <a:latin typeface="Arial"/>
+                  <a:srgbClr val="F7C948"/>
+                </a:solidFill>
+                <a:latin typeface="Verdana"/>
               </a:rPr>
               <a:t>AI Literacy</a:t>
             </a:r>
@@ -8289,9 +8289,9 @@
             <a:r>
               <a:rPr sz="4800" b="1">
                 <a:solidFill>
-                  <a:srgbClr val="F7F2E9"/>
-                </a:solidFill>
-                <a:latin typeface="Georgia"/>
+                  <a:srgbClr val="F7C948"/>
+                </a:solidFill>
+                <a:latin typeface="Impact"/>
               </a:rPr>
               <a:t>AI at work</a:t>
             </a:r>
@@ -8313,7 +8313,7 @@
             <a:avLst/>
           </a:prstGeom>
           <a:solidFill>
-            <a:srgbClr val="C07A1E"/>
+            <a:srgbClr val="1FA3C8"/>
           </a:solidFill>
           <a:ln>
             <a:noFill/>
@@ -8372,9 +8372,9 @@
             <a:r>
               <a:rPr sz="2400" b="0">
                 <a:solidFill>
-                  <a:srgbClr val="A8D88A"/>
-                </a:solidFill>
-                <a:latin typeface="Arial"/>
+                  <a:srgbClr val="F7C948"/>
+                </a:solidFill>
+                <a:latin typeface="Verdana"/>
               </a:rPr>
               <a:t>Human or machine?</a:t>
             </a:r>
@@ -8396,11 +8396,11 @@
             <a:avLst/>
           </a:prstGeom>
           <a:solidFill>
-            <a:srgbClr val="FBF6EC"/>
+            <a:srgbClr val="FFFFFF"/>
           </a:solidFill>
           <a:ln w="15875">
             <a:solidFill>
-              <a:srgbClr val="E2D8C4"/>
+              <a:srgbClr val="D6336C"/>
             </a:solidFill>
           </a:ln>
           <a:effectLst/>
@@ -8457,9 +8457,9 @@
             <a:r>
               <a:rPr sz="1200" b="1">
                 <a:solidFill>
-                  <a:srgbClr val="C07A1E"/>
-                </a:solidFill>
-                <a:latin typeface="Arial"/>
+                  <a:srgbClr val="1FA3C8"/>
+                </a:solidFill>
+                <a:latin typeface="Verdana"/>
               </a:rPr>
               <a:t>POSTER ART · A-P12-ART · coming</a:t>
             </a:r>
@@ -8496,9 +8496,9 @@
             <a:r>
               <a:rPr sz="1800" b="1">
                 <a:solidFill>
-                  <a:srgbClr val="1F4D2B"/>
-                </a:solidFill>
-                <a:latin typeface="Georgia"/>
+                  <a:srgbClr val="111111"/>
+                </a:solidFill>
+                <a:latin typeface="Impact"/>
               </a:rPr>
               <a:t>Artwork for A-P12 · AI drafts, you own it</a:t>
             </a:r>
@@ -8535,9 +8535,9 @@
             <a:r>
               <a:rPr sz="1100" b="0">
                 <a:solidFill>
-                  <a:srgbClr val="20190F"/>
-                </a:solidFill>
-                <a:latin typeface="Arial"/>
+                  <a:srgbClr val="111111"/>
+                </a:solidFill>
+                <a:latin typeface="Verdana"/>
               </a:rPr>
               <a:t>A young woman at a table under a shade-net, a phone propped up showing a page of text-lines (lines, not words), a printed page in front of her that she is correcting with a red pen — crossing out one line, writing above it. Beside her, her own harvest book and a crate of spinach bunches with a price tag (blank). Four callouts: ① the red pen on a number,…</a:t>
             </a:r>
@@ -8558,7 +8558,7 @@
     <p:bg>
       <p:bgPr>
         <a:solidFill>
-          <a:srgbClr val="F7F2E9"/>
+          <a:srgbClr val="FFFFFF"/>
         </a:solidFill>
         <a:effectLst/>
       </p:bgPr>
@@ -8600,9 +8600,9 @@
             <a:r>
               <a:rPr sz="1000" b="0">
                 <a:solidFill>
-                  <a:srgbClr val="6B6255"/>
-                </a:solidFill>
-                <a:latin typeface="Arial"/>
+                  <a:srgbClr val="111111"/>
+                </a:solidFill>
+                <a:latin typeface="Verdana"/>
               </a:rPr>
               <a:t>A-D2-16   ·   Poster A-P12</a:t>
             </a:r>
@@ -8639,9 +8639,9 @@
             <a:r>
               <a:rPr sz="1000" b="0">
                 <a:solidFill>
-                  <a:srgbClr val="6B6255"/>
-                </a:solidFill>
-                <a:latin typeface="Arial"/>
+                  <a:srgbClr val="111111"/>
+                </a:solidFill>
+                <a:latin typeface="Verdana"/>
               </a:rPr>
               <a:t>AI Literacy</a:t>
             </a:r>
@@ -8678,9 +8678,9 @@
             <a:r>
               <a:rPr sz="3800" b="1">
                 <a:solidFill>
-                  <a:srgbClr val="1F4D2B"/>
-                </a:solidFill>
-                <a:latin typeface="Georgia"/>
+                  <a:srgbClr val="111111"/>
+                </a:solidFill>
+                <a:latin typeface="Impact"/>
               </a:rPr>
               <a:t>AI drafts. You own it.</a:t>
             </a:r>
@@ -8702,7 +8702,7 @@
             <a:avLst/>
           </a:prstGeom>
           <a:solidFill>
-            <a:srgbClr val="E2D8C4"/>
+            <a:srgbClr val="D6336C"/>
           </a:solidFill>
           <a:ln>
             <a:noFill/>
@@ -8761,9 +8761,9 @@
             <a:r>
               <a:rPr sz="2800" b="0">
                 <a:solidFill>
-                  <a:srgbClr val="20190F"/>
-                </a:solidFill>
-                <a:latin typeface="Arial"/>
+                  <a:srgbClr val="111111"/>
+                </a:solidFill>
+                <a:latin typeface="Verdana"/>
               </a:rPr>
               <a:t>•  Facts true? Sounds like me?</a:t>
             </a:r>
@@ -8777,9 +8777,9 @@
             <a:r>
               <a:rPr sz="2800" b="0">
                 <a:solidFill>
-                  <a:srgbClr val="20190F"/>
-                </a:solidFill>
-                <a:latin typeface="Arial"/>
+                  <a:srgbClr val="111111"/>
+                </a:solidFill>
+                <a:latin typeface="Verdana"/>
               </a:rPr>
               <a:t>•  Nothing private?</a:t>
             </a:r>
@@ -8793,9 +8793,9 @@
             <a:r>
               <a:rPr sz="2800" b="0">
                 <a:solidFill>
-                  <a:srgbClr val="20190F"/>
-                </a:solidFill>
-                <a:latin typeface="Arial"/>
+                  <a:srgbClr val="111111"/>
+                </a:solidFill>
+                <a:latin typeface="Verdana"/>
               </a:rPr>
               <a:t>•  Would I sign it?</a:t>
             </a:r>
@@ -8817,11 +8817,11 @@
             <a:avLst/>
           </a:prstGeom>
           <a:solidFill>
-            <a:srgbClr val="FBF6EC"/>
+            <a:srgbClr val="FFFFFF"/>
           </a:solidFill>
           <a:ln w="15875">
             <a:solidFill>
-              <a:srgbClr val="E2D8C4"/>
+              <a:srgbClr val="D6336C"/>
             </a:solidFill>
           </a:ln>
           <a:effectLst/>
@@ -8878,9 +8878,9 @@
             <a:r>
               <a:rPr sz="1200" b="1">
                 <a:solidFill>
-                  <a:srgbClr val="C07A1E"/>
-                </a:solidFill>
-                <a:latin typeface="Arial"/>
+                  <a:srgbClr val="1FA3C8"/>
+                </a:solidFill>
+                <a:latin typeface="Verdana"/>
               </a:rPr>
               <a:t>POSTER ART · A-P12-ART · coming</a:t>
             </a:r>
@@ -8917,9 +8917,9 @@
             <a:r>
               <a:rPr sz="1800" b="1">
                 <a:solidFill>
-                  <a:srgbClr val="1F4D2B"/>
-                </a:solidFill>
-                <a:latin typeface="Georgia"/>
+                  <a:srgbClr val="111111"/>
+                </a:solidFill>
+                <a:latin typeface="Impact"/>
               </a:rPr>
               <a:t>Artwork for A-P12 · AI drafts, you own it</a:t>
             </a:r>
@@ -8956,9 +8956,9 @@
             <a:r>
               <a:rPr sz="1100" b="0">
                 <a:solidFill>
-                  <a:srgbClr val="20190F"/>
-                </a:solidFill>
-                <a:latin typeface="Arial"/>
+                  <a:srgbClr val="111111"/>
+                </a:solidFill>
+                <a:latin typeface="Verdana"/>
               </a:rPr>
               <a:t>A young woman at a table under a shade-net, a phone propped up showing a page of text-lines (lines, not words), a printed page in front of her that she is correcting with a red pen — crossing out one line, writing above it. Beside her, her own harvest book and a crate of spinach bunches with a price tag (blank). Four callouts: ① the red pen on a number,…</a:t>
             </a:r>
@@ -8979,7 +8979,7 @@
     <p:bg>
       <p:bgPr>
         <a:solidFill>
-          <a:srgbClr val="F7F2E9"/>
+          <a:srgbClr val="FFFFFF"/>
         </a:solidFill>
         <a:effectLst/>
       </p:bgPr>
@@ -9021,9 +9021,9 @@
             <a:r>
               <a:rPr sz="1000" b="0">
                 <a:solidFill>
-                  <a:srgbClr val="6B6255"/>
-                </a:solidFill>
-                <a:latin typeface="Arial"/>
+                  <a:srgbClr val="111111"/>
+                </a:solidFill>
+                <a:latin typeface="Verdana"/>
               </a:rPr>
               <a:t>A-D2-17   ·   Poster A-P12</a:t>
             </a:r>
@@ -9060,9 +9060,9 @@
             <a:r>
               <a:rPr sz="1000" b="0">
                 <a:solidFill>
-                  <a:srgbClr val="6B6255"/>
-                </a:solidFill>
-                <a:latin typeface="Arial"/>
+                  <a:srgbClr val="111111"/>
+                </a:solidFill>
+                <a:latin typeface="Verdana"/>
               </a:rPr>
               <a:t>AI Literacy</a:t>
             </a:r>
@@ -9084,7 +9084,7 @@
             <a:avLst/>
           </a:prstGeom>
           <a:solidFill>
-            <a:srgbClr val="C07A1E"/>
+            <a:srgbClr val="1FA3C8"/>
           </a:solidFill>
           <a:ln>
             <a:noFill/>
@@ -9143,9 +9143,9 @@
             <a:r>
               <a:rPr sz="1400" b="1">
                 <a:solidFill>
-                  <a:srgbClr val="F7F2E9"/>
-                </a:solidFill>
-                <a:latin typeface="Arial"/>
+                  <a:srgbClr val="FFFFFF"/>
+                </a:solidFill>
+                <a:latin typeface="Verdana"/>
               </a:rPr>
               <a:t>YOUR TURN</a:t>
             </a:r>
@@ -9182,9 +9182,9 @@
             <a:r>
               <a:rPr sz="3800" b="1">
                 <a:solidFill>
-                  <a:srgbClr val="1F4D2B"/>
-                </a:solidFill>
-                <a:latin typeface="Georgia"/>
+                  <a:srgbClr val="111111"/>
+                </a:solidFill>
+                <a:latin typeface="Impact"/>
               </a:rPr>
               <a:t>Draft it, fix it</a:t>
             </a:r>
@@ -9206,7 +9206,7 @@
             <a:avLst/>
           </a:prstGeom>
           <a:solidFill>
-            <a:srgbClr val="E2D8C4"/>
+            <a:srgbClr val="D6336C"/>
           </a:solidFill>
           <a:ln>
             <a:noFill/>
@@ -9265,9 +9265,9 @@
             <a:r>
               <a:rPr sz="2600" b="1">
                 <a:solidFill>
-                  <a:srgbClr val="20190F"/>
-                </a:solidFill>
-                <a:latin typeface="Arial"/>
+                  <a:srgbClr val="111111"/>
+                </a:solidFill>
+                <a:latin typeface="Verdana"/>
               </a:rPr>
               <a:t>•  A: selling message · B: price list</a:t>
             </a:r>
@@ -9281,9 +9281,9 @@
             <a:r>
               <a:rPr sz="2600" b="1">
                 <a:solidFill>
-                  <a:srgbClr val="20190F"/>
-                </a:solidFill>
-                <a:latin typeface="Arial"/>
+                  <a:srgbClr val="111111"/>
+                </a:solidFill>
+                <a:latin typeface="Verdana"/>
               </a:rPr>
               <a:t>•  C: CV · D: funding request</a:t>
             </a:r>
@@ -9297,9 +9297,9 @@
             <a:r>
               <a:rPr sz="2600" b="1">
                 <a:solidFill>
-                  <a:srgbClr val="20190F"/>
-                </a:solidFill>
-                <a:latin typeface="Arial"/>
+                  <a:srgbClr val="111111"/>
+                </a:solidFill>
+                <a:latin typeface="Verdana"/>
               </a:rPr>
               <a:t>•  Red pen: the four checks</a:t>
             </a:r>
@@ -9321,11 +9321,11 @@
             <a:avLst/>
           </a:prstGeom>
           <a:solidFill>
-            <a:srgbClr val="FBF6EC"/>
+            <a:srgbClr val="FFFFFF"/>
           </a:solidFill>
           <a:ln w="15875">
             <a:solidFill>
-              <a:srgbClr val="E2D8C4"/>
+              <a:srgbClr val="D6336C"/>
             </a:solidFill>
           </a:ln>
           <a:effectLst/>
@@ -9382,9 +9382,9 @@
             <a:r>
               <a:rPr sz="1200" b="1">
                 <a:solidFill>
-                  <a:srgbClr val="C07A1E"/>
-                </a:solidFill>
-                <a:latin typeface="Arial"/>
+                  <a:srgbClr val="1FA3C8"/>
+                </a:solidFill>
+                <a:latin typeface="Verdana"/>
               </a:rPr>
               <a:t>IMAGE · A-IMG-09 · coming</a:t>
             </a:r>
@@ -9421,9 +9421,9 @@
             <a:r>
               <a:rPr sz="1800" b="1">
                 <a:solidFill>
-                  <a:srgbClr val="1F4D2B"/>
-                </a:solidFill>
-                <a:latin typeface="Georgia"/>
+                  <a:srgbClr val="111111"/>
+                </a:solidFill>
+                <a:latin typeface="Impact"/>
               </a:rPr>
               <a:t>Red pen on the draft</a:t>
             </a:r>
@@ -9460,9 +9460,9 @@
             <a:r>
               <a:rPr sz="1100" b="0">
                 <a:solidFill>
-                  <a:srgbClr val="20190F"/>
-                </a:solidFill>
-                <a:latin typeface="Arial"/>
+                  <a:srgbClr val="111111"/>
+                </a:solidFill>
+                <a:latin typeface="Verdana"/>
               </a:rPr>
               <a:t>Landscape 16:9, top-down. A table with: a printed page of lines (no words) with two lines crossed out in red and new squiggles written above; a phone showing a chat bubble; a till slip beside it with a finger tracing a line on the slip; an exercise-book money record open; a red pen. Hands of a young woman.</a:t>
             </a:r>
@@ -9483,7 +9483,7 @@
     <p:bg>
       <p:bgPr>
         <a:solidFill>
-          <a:srgbClr val="F7F2E9"/>
+          <a:srgbClr val="FFFFFF"/>
         </a:solidFill>
         <a:effectLst/>
       </p:bgPr>
@@ -9525,9 +9525,9 @@
             <a:r>
               <a:rPr sz="1000" b="0">
                 <a:solidFill>
-                  <a:srgbClr val="6B6255"/>
-                </a:solidFill>
-                <a:latin typeface="Arial"/>
+                  <a:srgbClr val="111111"/>
+                </a:solidFill>
+                <a:latin typeface="Verdana"/>
               </a:rPr>
               <a:t>A-D2-18   ·   Poster A-P12</a:t>
             </a:r>
@@ -9564,9 +9564,9 @@
             <a:r>
               <a:rPr sz="1000" b="0">
                 <a:solidFill>
-                  <a:srgbClr val="6B6255"/>
-                </a:solidFill>
-                <a:latin typeface="Arial"/>
+                  <a:srgbClr val="111111"/>
+                </a:solidFill>
+                <a:latin typeface="Verdana"/>
               </a:rPr>
               <a:t>AI Literacy</a:t>
             </a:r>
@@ -9588,7 +9588,7 @@
             <a:avLst/>
           </a:prstGeom>
           <a:solidFill>
-            <a:srgbClr val="235E86"/>
+            <a:srgbClr val="D6336C"/>
           </a:solidFill>
           <a:ln>
             <a:noFill/>
@@ -9647,9 +9647,9 @@
             <a:r>
               <a:rPr sz="1200" b="1">
                 <a:solidFill>
-                  <a:srgbClr val="F7F2E9"/>
-                </a:solidFill>
-                <a:latin typeface="Arial"/>
+                  <a:srgbClr val="FFFFFF"/>
+                </a:solidFill>
+                <a:latin typeface="Verdana"/>
               </a:rPr>
               <a:t>APP</a:t>
             </a:r>
@@ -9671,7 +9671,7 @@
             <a:avLst/>
           </a:prstGeom>
           <a:solidFill>
-            <a:srgbClr val="C07A1E"/>
+            <a:srgbClr val="1FA3C8"/>
           </a:solidFill>
           <a:ln>
             <a:noFill/>
@@ -9730,9 +9730,9 @@
             <a:r>
               <a:rPr sz="1400" b="1">
                 <a:solidFill>
-                  <a:srgbClr val="F7F2E9"/>
-                </a:solidFill>
-                <a:latin typeface="Arial"/>
+                  <a:srgbClr val="FFFFFF"/>
+                </a:solidFill>
+                <a:latin typeface="Verdana"/>
               </a:rPr>
               <a:t>YOUR TURN</a:t>
             </a:r>
@@ -9769,9 +9769,9 @@
             <a:r>
               <a:rPr sz="3800" b="1">
                 <a:solidFill>
-                  <a:srgbClr val="1F4D2B"/>
-                </a:solidFill>
-                <a:latin typeface="Georgia"/>
+                  <a:srgbClr val="111111"/>
+                </a:solidFill>
+                <a:latin typeface="Impact"/>
               </a:rPr>
               <a:t>Scan a till slip — then check it</a:t>
             </a:r>
@@ -9793,7 +9793,7 @@
             <a:avLst/>
           </a:prstGeom>
           <a:solidFill>
-            <a:srgbClr val="E2D8C4"/>
+            <a:srgbClr val="D6336C"/>
           </a:solidFill>
           <a:ln>
             <a:noFill/>
@@ -9852,9 +9852,9 @@
             <a:r>
               <a:rPr sz="3000" b="1">
                 <a:solidFill>
-                  <a:srgbClr val="20190F"/>
-                </a:solidFill>
-                <a:latin typeface="Arial"/>
+                  <a:srgbClr val="111111"/>
+                </a:solidFill>
+                <a:latin typeface="Verdana"/>
               </a:rPr>
               <a:t>•  Records → Spent → scan a slip</a:t>
             </a:r>
@@ -9868,9 +9868,9 @@
             <a:r>
               <a:rPr sz="3000" b="1">
                 <a:solidFill>
-                  <a:srgbClr val="20190F"/>
-                </a:solidFill>
-                <a:latin typeface="Arial"/>
+                  <a:srgbClr val="111111"/>
+                </a:solidFill>
+                <a:latin typeface="Verdana"/>
               </a:rPr>
               <a:t>•  Check total, item, shop</a:t>
             </a:r>
@@ -9884,9 +9884,9 @@
             <a:r>
               <a:rPr sz="3000" b="1">
                 <a:solidFill>
-                  <a:srgbClr val="20190F"/>
-                </a:solidFill>
-                <a:latin typeface="Arial"/>
+                  <a:srgbClr val="111111"/>
+                </a:solidFill>
+                <a:latin typeface="Verdana"/>
               </a:rPr>
               <a:t>•  The slip wins</a:t>
             </a:r>
@@ -9908,11 +9908,11 @@
             <a:avLst/>
           </a:prstGeom>
           <a:solidFill>
-            <a:srgbClr val="FBF6EC"/>
+            <a:srgbClr val="FFFFFF"/>
           </a:solidFill>
           <a:ln w="15875">
             <a:solidFill>
-              <a:srgbClr val="E2D8C4"/>
+              <a:srgbClr val="D6336C"/>
             </a:solidFill>
           </a:ln>
           <a:effectLst/>
@@ -9969,9 +9969,9 @@
             <a:r>
               <a:rPr sz="1200" b="1">
                 <a:solidFill>
-                  <a:srgbClr val="C07A1E"/>
-                </a:solidFill>
-                <a:latin typeface="Arial"/>
+                  <a:srgbClr val="1FA3C8"/>
+                </a:solidFill>
+                <a:latin typeface="Verdana"/>
               </a:rPr>
               <a:t>PHOTO · A-PHO-05 · coming</a:t>
             </a:r>
@@ -10008,9 +10008,9 @@
             <a:r>
               <a:rPr sz="1800" b="1">
                 <a:solidFill>
-                  <a:srgbClr val="1F4D2B"/>
-                </a:solidFill>
-                <a:latin typeface="Georgia"/>
+                  <a:srgbClr val="111111"/>
+                </a:solidFill>
+                <a:latin typeface="Impact"/>
               </a:rPr>
               <a:t>Screen: till slip read in Records → Spent</a:t>
             </a:r>
@@ -10047,9 +10047,9 @@
             <a:r>
               <a:rPr sz="1100" b="0">
                 <a:solidFill>
-                  <a:srgbClr val="20190F"/>
-                </a:solidFill>
-                <a:latin typeface="Arial"/>
+                  <a:srgbClr val="111111"/>
+                </a:solidFill>
+                <a:latin typeface="Verdana"/>
               </a:rPr>
               <a:t>Side-by-side: a photo of a real till slip (an invented or blurred shop name, no card numbers) and the Records → Spent entry after "scan a till slip" showing total, item and shop. If possible use an example where the reader made a small mistake (e.g. read the change as the total) — mark it with a red circle added on the slide, not in the screenshot.</a:t>
             </a:r>
@@ -10070,7 +10070,7 @@
     <p:bg>
       <p:bgPr>
         <a:solidFill>
-          <a:srgbClr val="F7F2E9"/>
+          <a:srgbClr val="FFFFFF"/>
         </a:solidFill>
         <a:effectLst/>
       </p:bgPr>
@@ -10112,9 +10112,9 @@
             <a:r>
               <a:rPr sz="1000" b="0">
                 <a:solidFill>
-                  <a:srgbClr val="6B6255"/>
-                </a:solidFill>
-                <a:latin typeface="Arial"/>
+                  <a:srgbClr val="111111"/>
+                </a:solidFill>
+                <a:latin typeface="Verdana"/>
               </a:rPr>
               <a:t>A-D2-19   ·   Poster A-P12</a:t>
             </a:r>
@@ -10151,9 +10151,9 @@
             <a:r>
               <a:rPr sz="1000" b="0">
                 <a:solidFill>
-                  <a:srgbClr val="6B6255"/>
-                </a:solidFill>
-                <a:latin typeface="Arial"/>
+                  <a:srgbClr val="111111"/>
+                </a:solidFill>
+                <a:latin typeface="Verdana"/>
               </a:rPr>
               <a:t>AI Literacy</a:t>
             </a:r>
@@ -10175,7 +10175,7 @@
             <a:avLst/>
           </a:prstGeom>
           <a:solidFill>
-            <a:srgbClr val="235E86"/>
+            <a:srgbClr val="D6336C"/>
           </a:solidFill>
           <a:ln>
             <a:noFill/>
@@ -10234,9 +10234,9 @@
             <a:r>
               <a:rPr sz="1200" b="1">
                 <a:solidFill>
-                  <a:srgbClr val="F7F2E9"/>
-                </a:solidFill>
-                <a:latin typeface="Arial"/>
+                  <a:srgbClr val="FFFFFF"/>
+                </a:solidFill>
+                <a:latin typeface="Verdana"/>
               </a:rPr>
               <a:t>APP</a:t>
             </a:r>
@@ -10258,7 +10258,7 @@
             <a:avLst/>
           </a:prstGeom>
           <a:solidFill>
-            <a:srgbClr val="C07A1E"/>
+            <a:srgbClr val="1FA3C8"/>
           </a:solidFill>
           <a:ln>
             <a:noFill/>
@@ -10317,9 +10317,9 @@
             <a:r>
               <a:rPr sz="1400" b="1">
                 <a:solidFill>
-                  <a:srgbClr val="F7F2E9"/>
-                </a:solidFill>
-                <a:latin typeface="Arial"/>
+                  <a:srgbClr val="FFFFFF"/>
+                </a:solidFill>
+                <a:latin typeface="Verdana"/>
               </a:rPr>
               <a:t>YOUR TURN</a:t>
             </a:r>
@@ -10356,9 +10356,9 @@
             <a:r>
               <a:rPr sz="3800" b="1">
                 <a:solidFill>
-                  <a:srgbClr val="1F4D2B"/>
-                </a:solidFill>
-                <a:latin typeface="Georgia"/>
+                  <a:srgbClr val="111111"/>
+                </a:solidFill>
+                <a:latin typeface="Impact"/>
               </a:rPr>
               <a:t>Read the report before it goes</a:t>
             </a:r>
@@ -10380,7 +10380,7 @@
             <a:avLst/>
           </a:prstGeom>
           <a:solidFill>
-            <a:srgbClr val="E2D8C4"/>
+            <a:srgbClr val="D6336C"/>
           </a:solidFill>
           <a:ln>
             <a:noFill/>
@@ -10439,9 +10439,9 @@
             <a:r>
               <a:rPr sz="3000" b="1">
                 <a:solidFill>
-                  <a:srgbClr val="20190F"/>
-                </a:solidFill>
-                <a:latin typeface="Arial"/>
+                  <a:srgbClr val="111111"/>
+                </a:solidFill>
+                <a:latin typeface="Verdana"/>
               </a:rPr>
               <a:t>•  Generate a report</a:t>
             </a:r>
@@ -10455,9 +10455,9 @@
             <a:r>
               <a:rPr sz="3000" b="1">
                 <a:solidFill>
-                  <a:srgbClr val="20190F"/>
-                </a:solidFill>
-                <a:latin typeface="Arial"/>
+                  <a:srgbClr val="111111"/>
+                </a:solidFill>
+                <a:latin typeface="Verdana"/>
               </a:rPr>
               <a:t>•  Underline anything not true</a:t>
             </a:r>
@@ -10471,9 +10471,9 @@
             <a:r>
               <a:rPr sz="3000" b="1">
                 <a:solidFill>
-                  <a:srgbClr val="20190F"/>
-                </a:solidFill>
-                <a:latin typeface="Arial"/>
+                  <a:srgbClr val="111111"/>
+                </a:solidFill>
+                <a:latin typeface="Verdana"/>
               </a:rPr>
               <a:t>•  Correct it before it's sent</a:t>
             </a:r>
@@ -10495,11 +10495,11 @@
             <a:avLst/>
           </a:prstGeom>
           <a:solidFill>
-            <a:srgbClr val="FBF6EC"/>
+            <a:srgbClr val="FFFFFF"/>
           </a:solidFill>
           <a:ln w="15875">
             <a:solidFill>
-              <a:srgbClr val="E2D8C4"/>
+              <a:srgbClr val="D6336C"/>
             </a:solidFill>
           </a:ln>
           <a:effectLst/>
@@ -10556,9 +10556,9 @@
             <a:r>
               <a:rPr sz="1200" b="1">
                 <a:solidFill>
-                  <a:srgbClr val="C07A1E"/>
-                </a:solidFill>
-                <a:latin typeface="Arial"/>
+                  <a:srgbClr val="1FA3C8"/>
+                </a:solidFill>
+                <a:latin typeface="Verdana"/>
               </a:rPr>
               <a:t>PHOTO · A-PHO-06 · coming</a:t>
             </a:r>
@@ -10595,9 +10595,9 @@
             <a:r>
               <a:rPr sz="1800" b="1">
                 <a:solidFill>
-                  <a:srgbClr val="1F4D2B"/>
-                </a:solidFill>
-                <a:latin typeface="Georgia"/>
+                  <a:srgbClr val="111111"/>
+                </a:solidFill>
+                <a:latin typeface="Impact"/>
               </a:rPr>
               <a:t>Screen: an AI-written report</a:t>
             </a:r>
@@ -10634,9 +10634,9 @@
             <a:r>
               <a:rPr sz="1100" b="0">
                 <a:solidFill>
-                  <a:srgbClr val="20190F"/>
-                </a:solidFill>
-                <a:latin typeface="Arial"/>
+                  <a:srgbClr val="111111"/>
+                </a:solidFill>
+                <a:latin typeface="Verdana"/>
               </a:rPr>
               <a:t>Screenshot of a Reports page generated for a demo garden. Crop to one paragraph and one chart. No real names or locations.</a:t>
             </a:r>
@@ -10657,7 +10657,7 @@
     <p:bg>
       <p:bgPr>
         <a:solidFill>
-          <a:srgbClr val="1F4D2B"/>
+          <a:srgbClr val="1B1F3B"/>
         </a:solidFill>
         <a:effectLst/>
       </p:bgPr>
@@ -10699,9 +10699,9 @@
             <a:r>
               <a:rPr sz="1000" b="0">
                 <a:solidFill>
-                  <a:srgbClr val="A8D88A"/>
-                </a:solidFill>
-                <a:latin typeface="Arial"/>
+                  <a:srgbClr val="F7C948"/>
+                </a:solidFill>
+                <a:latin typeface="Verdana"/>
               </a:rPr>
               <a:t>A-D2-02   ·   Poster A-P07</a:t>
             </a:r>
@@ -10738,9 +10738,9 @@
             <a:r>
               <a:rPr sz="1000" b="0">
                 <a:solidFill>
-                  <a:srgbClr val="A8D88A"/>
-                </a:solidFill>
-                <a:latin typeface="Arial"/>
+                  <a:srgbClr val="F7C948"/>
+                </a:solidFill>
+                <a:latin typeface="Verdana"/>
               </a:rPr>
               <a:t>AI Literacy</a:t>
             </a:r>
@@ -10777,9 +10777,9 @@
             <a:r>
               <a:rPr sz="4800" b="1">
                 <a:solidFill>
-                  <a:srgbClr val="F7F2E9"/>
-                </a:solidFill>
-                <a:latin typeface="Georgia"/>
+                  <a:srgbClr val="F7C948"/>
+                </a:solidFill>
+                <a:latin typeface="Impact"/>
               </a:rPr>
               <a:t>Check before you trust</a:t>
             </a:r>
@@ -10801,7 +10801,7 @@
             <a:avLst/>
           </a:prstGeom>
           <a:solidFill>
-            <a:srgbClr val="C07A1E"/>
+            <a:srgbClr val="1FA3C8"/>
           </a:solidFill>
           <a:ln>
             <a:noFill/>
@@ -10860,9 +10860,9 @@
             <a:r>
               <a:rPr sz="2400" b="0">
                 <a:solidFill>
-                  <a:srgbClr val="A8D88A"/>
-                </a:solidFill>
-                <a:latin typeface="Arial"/>
+                  <a:srgbClr val="F7C948"/>
+                </a:solidFill>
+                <a:latin typeface="Verdana"/>
               </a:rPr>
               <a:t>"Plant cabbage 5 cm apart."</a:t>
             </a:r>
@@ -10876,9 +10876,9 @@
             <a:r>
               <a:rPr sz="2400" b="0">
                 <a:solidFill>
-                  <a:srgbClr val="A8D88A"/>
-                </a:solidFill>
-                <a:latin typeface="Arial"/>
+                  <a:srgbClr val="F7C948"/>
+                </a:solidFill>
+                <a:latin typeface="Verdana"/>
               </a:rPr>
               <a:t>Would you do it?</a:t>
             </a:r>
@@ -10900,11 +10900,11 @@
             <a:avLst/>
           </a:prstGeom>
           <a:solidFill>
-            <a:srgbClr val="FBF6EC"/>
+            <a:srgbClr val="FFFFFF"/>
           </a:solidFill>
           <a:ln w="15875">
             <a:solidFill>
-              <a:srgbClr val="E2D8C4"/>
+              <a:srgbClr val="D6336C"/>
             </a:solidFill>
           </a:ln>
           <a:effectLst/>
@@ -10961,9 +10961,9 @@
             <a:r>
               <a:rPr sz="1200" b="1">
                 <a:solidFill>
-                  <a:srgbClr val="C07A1E"/>
-                </a:solidFill>
-                <a:latin typeface="Arial"/>
+                  <a:srgbClr val="1FA3C8"/>
+                </a:solidFill>
+                <a:latin typeface="Verdana"/>
               </a:rPr>
               <a:t>IMAGE · A-IMG-05 · coming</a:t>
             </a:r>
@@ -11000,9 +11000,9 @@
             <a:r>
               <a:rPr sz="1800" b="1">
                 <a:solidFill>
-                  <a:srgbClr val="1F4D2B"/>
-                </a:solidFill>
-                <a:latin typeface="Georgia"/>
+                  <a:srgbClr val="111111"/>
+                </a:solidFill>
+                <a:latin typeface="Impact"/>
               </a:rPr>
               <a:t>The AI desk (facilitator plays the machine)</a:t>
             </a:r>
@@ -11039,9 +11039,9 @@
             <a:r>
               <a:rPr sz="1100" b="0">
                 <a:solidFill>
-                  <a:srgbClr val="20190F"/>
-                </a:solidFill>
-                <a:latin typeface="Arial"/>
+                  <a:srgbClr val="111111"/>
+                </a:solidFill>
+                <a:latin typeface="Verdana"/>
               </a:rPr>
               <a:t>Landscape 16:9. A facilitator (woman, 30s) sits on a chair at the side of a hall wearing a large card on a string round her neck — the card shows a simple drawn phone with a question mark (a drawing, not words). She holds a small stack of cards and reads one in a deadpan, confident way. A group Reporter (young man) stands in front of her with a notebook;…</a:t>
             </a:r>
@@ -11062,7 +11062,7 @@
     <p:bg>
       <p:bgPr>
         <a:solidFill>
-          <a:srgbClr val="F7F2E9"/>
+          <a:srgbClr val="FFFFFF"/>
         </a:solidFill>
         <a:effectLst/>
       </p:bgPr>
@@ -11104,9 +11104,9 @@
             <a:r>
               <a:rPr sz="1000" b="0">
                 <a:solidFill>
-                  <a:srgbClr val="6B6255"/>
-                </a:solidFill>
-                <a:latin typeface="Arial"/>
+                  <a:srgbClr val="111111"/>
+                </a:solidFill>
+                <a:latin typeface="Verdana"/>
               </a:rPr>
               <a:t>A-D2-20   ·   Poster A-P13</a:t>
             </a:r>
@@ -11143,9 +11143,9 @@
             <a:r>
               <a:rPr sz="1000" b="0">
                 <a:solidFill>
-                  <a:srgbClr val="6B6255"/>
-                </a:solidFill>
-                <a:latin typeface="Arial"/>
+                  <a:srgbClr val="111111"/>
+                </a:solidFill>
+                <a:latin typeface="Verdana"/>
               </a:rPr>
               <a:t>AI Literacy</a:t>
             </a:r>
@@ -11182,9 +11182,9 @@
             <a:r>
               <a:rPr sz="3800" b="1">
                 <a:solidFill>
-                  <a:srgbClr val="1F4D2B"/>
-                </a:solidFill>
-                <a:latin typeface="Georgia"/>
+                  <a:srgbClr val="111111"/>
+                </a:solidFill>
+                <a:latin typeface="Impact"/>
               </a:rPr>
               <a:t>Only people can do this</a:t>
             </a:r>
@@ -11206,7 +11206,7 @@
             <a:avLst/>
           </a:prstGeom>
           <a:solidFill>
-            <a:srgbClr val="E2D8C4"/>
+            <a:srgbClr val="D6336C"/>
           </a:solidFill>
           <a:ln>
             <a:noFill/>
@@ -11265,9 +11265,9 @@
             <a:r>
               <a:rPr sz="2400" b="0">
                 <a:solidFill>
-                  <a:srgbClr val="20190F"/>
-                </a:solidFill>
-                <a:latin typeface="Arial"/>
+                  <a:srgbClr val="111111"/>
+                </a:solidFill>
+                <a:latin typeface="Verdana"/>
               </a:rPr>
               <a:t>•  Feel your soil · measure the rain</a:t>
             </a:r>
@@ -11281,9 +11281,9 @@
             <a:r>
               <a:rPr sz="2400" b="0">
                 <a:solidFill>
-                  <a:srgbClr val="20190F"/>
-                </a:solidFill>
-                <a:latin typeface="Arial"/>
+                  <a:srgbClr val="111111"/>
+                </a:solidFill>
+                <a:latin typeface="Verdana"/>
               </a:rPr>
               <a:t>•  Elders' knowledge · your mentor</a:t>
             </a:r>
@@ -11297,9 +11297,9 @@
             <a:r>
               <a:rPr sz="2400" b="0">
                 <a:solidFill>
-                  <a:srgbClr val="20190F"/>
-                </a:solidFill>
-                <a:latin typeface="Arial"/>
+                  <a:srgbClr val="111111"/>
+                </a:solidFill>
+                <a:latin typeface="Verdana"/>
               </a:rPr>
               <a:t>•  Our languages: double-check</a:t>
             </a:r>
@@ -11321,11 +11321,11 @@
             <a:avLst/>
           </a:prstGeom>
           <a:solidFill>
-            <a:srgbClr val="FBF6EC"/>
+            <a:srgbClr val="FFFFFF"/>
           </a:solidFill>
           <a:ln w="15875">
             <a:solidFill>
-              <a:srgbClr val="E2D8C4"/>
+              <a:srgbClr val="D6336C"/>
             </a:solidFill>
           </a:ln>
           <a:effectLst/>
@@ -11382,9 +11382,9 @@
             <a:r>
               <a:rPr sz="1200" b="1">
                 <a:solidFill>
-                  <a:srgbClr val="C07A1E"/>
-                </a:solidFill>
-                <a:latin typeface="Arial"/>
+                  <a:srgbClr val="1FA3C8"/>
+                </a:solidFill>
+                <a:latin typeface="Verdana"/>
               </a:rPr>
               <a:t>POSTER ART · A-P13-ART · coming</a:t>
             </a:r>
@@ -11421,9 +11421,9 @@
             <a:r>
               <a:rPr sz="1800" b="1">
                 <a:solidFill>
-                  <a:srgbClr val="1F4D2B"/>
-                </a:solidFill>
-                <a:latin typeface="Georgia"/>
+                  <a:srgbClr val="111111"/>
+                </a:solidFill>
+                <a:latin typeface="Impact"/>
               </a:rPr>
               <a:t>Artwork for A-P13 · What AI can't do</a:t>
             </a:r>
@@ -11460,9 +11460,9 @@
             <a:r>
               <a:rPr sz="1100" b="0">
                 <a:solidFill>
-                  <a:srgbClr val="20190F"/>
-                </a:solidFill>
-                <a:latin typeface="Arial"/>
+                  <a:srgbClr val="111111"/>
+                </a:solidFill>
+                <a:latin typeface="Verdana"/>
               </a:rPr>
               <a:t>A warm farm scene with a phone lying small on a fence post, screen dark. Around the scene: ① a farmer squeezing a handful of soil and smelling it; ② a rain gauge (a cut 2 ℓ bottle) on a post, with a farmer reading it; ③ a gogo teaching a child to sort seed from a gourd; ④ a mentor and a farmer walking a bed together, talking; ⑤ two people with different…</a:t>
             </a:r>
@@ -11483,7 +11483,7 @@
     <p:bg>
       <p:bgPr>
         <a:solidFill>
-          <a:srgbClr val="F7F2E9"/>
+          <a:srgbClr val="FFFFFF"/>
         </a:solidFill>
         <a:effectLst/>
       </p:bgPr>
@@ -11525,9 +11525,9 @@
             <a:r>
               <a:rPr sz="1000" b="0">
                 <a:solidFill>
-                  <a:srgbClr val="6B6255"/>
-                </a:solidFill>
-                <a:latin typeface="Arial"/>
+                  <a:srgbClr val="111111"/>
+                </a:solidFill>
+                <a:latin typeface="Verdana"/>
               </a:rPr>
               <a:t>A-D2-21   ·   Poster A-P13</a:t>
             </a:r>
@@ -11564,9 +11564,9 @@
             <a:r>
               <a:rPr sz="1000" b="0">
                 <a:solidFill>
-                  <a:srgbClr val="6B6255"/>
-                </a:solidFill>
-                <a:latin typeface="Arial"/>
+                  <a:srgbClr val="111111"/>
+                </a:solidFill>
+                <a:latin typeface="Verdana"/>
               </a:rPr>
               <a:t>AI Literacy</a:t>
             </a:r>
@@ -11603,9 +11603,9 @@
             <a:r>
               <a:rPr sz="3800" b="1">
                 <a:solidFill>
-                  <a:srgbClr val="1F4D2B"/>
-                </a:solidFill>
-                <a:latin typeface="Georgia"/>
+                  <a:srgbClr val="111111"/>
+                </a:solidFill>
+                <a:latin typeface="Impact"/>
               </a:rPr>
               <a:t>Fair and green AI</a:t>
             </a:r>
@@ -11627,7 +11627,7 @@
             <a:avLst/>
           </a:prstGeom>
           <a:solidFill>
-            <a:srgbClr val="E2D8C4"/>
+            <a:srgbClr val="D6336C"/>
           </a:solidFill>
           <a:ln>
             <a:noFill/>
@@ -11686,9 +11686,9 @@
             <a:r>
               <a:rPr sz="2400" b="0">
                 <a:solidFill>
-                  <a:srgbClr val="20190F"/>
-                </a:solidFill>
-                <a:latin typeface="Arial"/>
+                  <a:srgbClr val="111111"/>
+                </a:solidFill>
+                <a:latin typeface="Verdana"/>
               </a:rPr>
               <a:t>•  Weaker in our languages — double-check</a:t>
             </a:r>
@@ -11702,9 +11702,9 @@
             <a:r>
               <a:rPr sz="2400" b="0">
                 <a:solidFill>
-                  <a:srgbClr val="20190F"/>
-                </a:solidFill>
-                <a:latin typeface="Arial"/>
+                  <a:srgbClr val="111111"/>
+                </a:solidFill>
+                <a:latin typeface="Verdana"/>
               </a:rPr>
               <a:t>•  Tell it who you are</a:t>
             </a:r>
@@ -11718,9 +11718,9 @@
             <a:r>
               <a:rPr sz="2400" b="0">
                 <a:solidFill>
-                  <a:srgbClr val="20190F"/>
-                </a:solidFill>
-                <a:latin typeface="Arial"/>
+                  <a:srgbClr val="111111"/>
+                </a:solidFill>
+                <a:latin typeface="Verdana"/>
               </a:rPr>
               <a:t>•  One good question beats ten</a:t>
             </a:r>
@@ -11742,11 +11742,11 @@
             <a:avLst/>
           </a:prstGeom>
           <a:solidFill>
-            <a:srgbClr val="FBF6EC"/>
+            <a:srgbClr val="FFFFFF"/>
           </a:solidFill>
           <a:ln w="15875">
             <a:solidFill>
-              <a:srgbClr val="E2D8C4"/>
+              <a:srgbClr val="D6336C"/>
             </a:solidFill>
           </a:ln>
           <a:effectLst/>
@@ -11803,9 +11803,9 @@
             <a:r>
               <a:rPr sz="1200" b="1">
                 <a:solidFill>
-                  <a:srgbClr val="C07A1E"/>
-                </a:solidFill>
-                <a:latin typeface="Arial"/>
+                  <a:srgbClr val="1FA3C8"/>
+                </a:solidFill>
+                <a:latin typeface="Verdana"/>
               </a:rPr>
               <a:t>IMAGE · A-IMG-11 · coming</a:t>
             </a:r>
@@ -11842,9 +11842,9 @@
             <a:r>
               <a:rPr sz="1800" b="1">
                 <a:solidFill>
-                  <a:srgbClr val="1F4D2B"/>
-                </a:solidFill>
-                <a:latin typeface="Georgia"/>
+                  <a:srgbClr val="111111"/>
+                </a:solidFill>
+                <a:latin typeface="Impact"/>
               </a:rPr>
               <a:t>Fair and green AI</a:t>
             </a:r>
@@ -11881,9 +11881,9 @@
             <a:r>
               <a:rPr sz="1100" b="0">
                 <a:solidFill>
-                  <a:srgbClr val="20190F"/>
-                </a:solidFill>
-                <a:latin typeface="Arial"/>
+                  <a:srgbClr val="111111"/>
+                </a:solidFill>
+                <a:latin typeface="Verdana"/>
               </a:rPr>
               <a:t>Landscape 16:9. Foreground: a small homestead garden with a woman holding a phone, two speech bubbles above her — one full (English-shaped scribbles), one half-empty (her own language). Far background, on the horizon: a large windowless grey building with cooling fans, power lines running to it and a water tower beside it (the data centre). A thin dotted…</a:t>
             </a:r>
@@ -11904,7 +11904,7 @@
     <p:bg>
       <p:bgPr>
         <a:solidFill>
-          <a:srgbClr val="F7F2E9"/>
+          <a:srgbClr val="FFFFFF"/>
         </a:solidFill>
         <a:effectLst/>
       </p:bgPr>
@@ -11946,9 +11946,9 @@
             <a:r>
               <a:rPr sz="1000" b="0">
                 <a:solidFill>
-                  <a:srgbClr val="6B6255"/>
-                </a:solidFill>
-                <a:latin typeface="Arial"/>
+                  <a:srgbClr val="111111"/>
+                </a:solidFill>
+                <a:latin typeface="Verdana"/>
               </a:rPr>
               <a:t>A-D2-22   ·   Poster A-P14</a:t>
             </a:r>
@@ -11985,9 +11985,9 @@
             <a:r>
               <a:rPr sz="1000" b="0">
                 <a:solidFill>
-                  <a:srgbClr val="6B6255"/>
-                </a:solidFill>
-                <a:latin typeface="Arial"/>
+                  <a:srgbClr val="111111"/>
+                </a:solidFill>
+                <a:latin typeface="Verdana"/>
               </a:rPr>
               <a:t>AI Literacy</a:t>
             </a:r>
@@ -12009,7 +12009,7 @@
             <a:avLst/>
           </a:prstGeom>
           <a:solidFill>
-            <a:srgbClr val="C07A1E"/>
+            <a:srgbClr val="1FA3C8"/>
           </a:solidFill>
           <a:ln>
             <a:noFill/>
@@ -12068,9 +12068,9 @@
             <a:r>
               <a:rPr sz="1400" b="1">
                 <a:solidFill>
-                  <a:srgbClr val="F7F2E9"/>
-                </a:solidFill>
-                <a:latin typeface="Arial"/>
+                  <a:srgbClr val="FFFFFF"/>
+                </a:solidFill>
+                <a:latin typeface="Verdana"/>
               </a:rPr>
               <a:t>YOUR TURN</a:t>
             </a:r>
@@ -12107,9 +12107,9 @@
             <a:r>
               <a:rPr sz="3800" b="1">
                 <a:solidFill>
-                  <a:srgbClr val="1F4D2B"/>
-                </a:solidFill>
-                <a:latin typeface="Georgia"/>
+                  <a:srgbClr val="111111"/>
+                </a:solidFill>
+                <a:latin typeface="Impact"/>
               </a:rPr>
               <a:t>My AI plan</a:t>
             </a:r>
@@ -12131,7 +12131,7 @@
             <a:avLst/>
           </a:prstGeom>
           <a:solidFill>
-            <a:srgbClr val="E2D8C4"/>
+            <a:srgbClr val="D6336C"/>
           </a:solidFill>
           <a:ln>
             <a:noFill/>
@@ -12190,9 +12190,9 @@
             <a:r>
               <a:rPr sz="2600" b="1">
                 <a:solidFill>
-                  <a:srgbClr val="20190F"/>
-                </a:solidFill>
-                <a:latin typeface="Arial"/>
+                  <a:srgbClr val="111111"/>
+                </a:solidFill>
+                <a:latin typeface="Verdana"/>
               </a:rPr>
               <a:t>•  Use AI for · always ask a person</a:t>
             </a:r>
@@ -12206,9 +12206,9 @@
             <a:r>
               <a:rPr sz="2600" b="1">
                 <a:solidFill>
-                  <a:srgbClr val="20190F"/>
-                </a:solidFill>
-                <a:latin typeface="Arial"/>
+                  <a:srgbClr val="111111"/>
+                </a:solidFill>
+                <a:latin typeface="Verdana"/>
               </a:rPr>
               <a:t>•  My data rule · my safety step</a:t>
             </a:r>
@@ -12222,9 +12222,9 @@
             <a:r>
               <a:rPr sz="2600" b="1">
                 <a:solidFill>
-                  <a:srgbClr val="20190F"/>
-                </a:solidFill>
-                <a:latin typeface="Arial"/>
+                  <a:srgbClr val="111111"/>
+                </a:solidFill>
+                <a:latin typeface="Verdana"/>
               </a:rPr>
               <a:t>•  One person I will teach</a:t>
             </a:r>
@@ -12246,11 +12246,11 @@
             <a:avLst/>
           </a:prstGeom>
           <a:solidFill>
-            <a:srgbClr val="FBF6EC"/>
+            <a:srgbClr val="FFFFFF"/>
           </a:solidFill>
           <a:ln w="15875">
             <a:solidFill>
-              <a:srgbClr val="E2D8C4"/>
+              <a:srgbClr val="D6336C"/>
             </a:solidFill>
           </a:ln>
           <a:effectLst/>
@@ -12307,9 +12307,9 @@
             <a:r>
               <a:rPr sz="1200" b="1">
                 <a:solidFill>
-                  <a:srgbClr val="C07A1E"/>
-                </a:solidFill>
-                <a:latin typeface="Arial"/>
+                  <a:srgbClr val="1FA3C8"/>
+                </a:solidFill>
+                <a:latin typeface="Verdana"/>
               </a:rPr>
               <a:t>POSTER ART · A-P14-ART · coming</a:t>
             </a:r>
@@ -12346,9 +12346,9 @@
             <a:r>
               <a:rPr sz="1800" b="1">
                 <a:solidFill>
-                  <a:srgbClr val="1F4D2B"/>
-                </a:solidFill>
-                <a:latin typeface="Georgia"/>
+                  <a:srgbClr val="111111"/>
+                </a:solidFill>
+                <a:latin typeface="Impact"/>
               </a:rPr>
               <a:t>Artwork for A-P14 · My AI plan</a:t>
             </a:r>
@@ -12385,9 +12385,9 @@
             <a:r>
               <a:rPr sz="1100" b="0">
                 <a:solidFill>
-                  <a:srgbClr val="20190F"/>
-                </a:solidFill>
-                <a:latin typeface="Arial"/>
+                  <a:srgbClr val="111111"/>
+                </a:solidFill>
+                <a:latin typeface="Verdana"/>
               </a:rPr>
               <a:t>A young man and a gogo sit together on a bench outside a home, both holding plan sheets (blank lines). Between them, a phone and a small open notebook. Behind them, a flourishing garden bed, a water tank, a hen. Five small picture callouts floating above: ① a seedling in a speech bubble (use AI for ideas); ② two people talking (always ask a person); ③ a…</a:t>
             </a:r>
@@ -12408,7 +12408,7 @@
     <p:bg>
       <p:bgPr>
         <a:solidFill>
-          <a:srgbClr val="F7F2E9"/>
+          <a:srgbClr val="FFFFFF"/>
         </a:solidFill>
         <a:effectLst/>
       </p:bgPr>
@@ -12450,9 +12450,9 @@
             <a:r>
               <a:rPr sz="1000" b="0">
                 <a:solidFill>
-                  <a:srgbClr val="6B6255"/>
-                </a:solidFill>
-                <a:latin typeface="Arial"/>
+                  <a:srgbClr val="111111"/>
+                </a:solidFill>
+                <a:latin typeface="Verdana"/>
               </a:rPr>
               <a:t>A-D2-23   ·   Poster A-P14</a:t>
             </a:r>
@@ -12489,9 +12489,9 @@
             <a:r>
               <a:rPr sz="1000" b="0">
                 <a:solidFill>
-                  <a:srgbClr val="6B6255"/>
-                </a:solidFill>
-                <a:latin typeface="Arial"/>
+                  <a:srgbClr val="111111"/>
+                </a:solidFill>
+                <a:latin typeface="Verdana"/>
               </a:rPr>
               <a:t>AI Literacy</a:t>
             </a:r>
@@ -12528,9 +12528,9 @@
             <a:r>
               <a:rPr sz="3800" b="1">
                 <a:solidFill>
-                  <a:srgbClr val="1F4D2B"/>
-                </a:solidFill>
-                <a:latin typeface="Georgia"/>
+                  <a:srgbClr val="111111"/>
+                </a:solidFill>
+                <a:latin typeface="Impact"/>
               </a:rPr>
               <a:t>Well done</a:t>
             </a:r>
@@ -12552,7 +12552,7 @@
             <a:avLst/>
           </a:prstGeom>
           <a:solidFill>
-            <a:srgbClr val="E2D8C4"/>
+            <a:srgbClr val="D6336C"/>
           </a:solidFill>
           <a:ln>
             <a:noFill/>
@@ -12611,9 +12611,9 @@
             <a:r>
               <a:rPr sz="2800" b="0">
                 <a:solidFill>
-                  <a:srgbClr val="20190F"/>
-                </a:solidFill>
-                <a:latin typeface="Arial"/>
+                  <a:srgbClr val="111111"/>
+                </a:solidFill>
+                <a:latin typeface="Verdana"/>
               </a:rPr>
               <a:t>•  Use it to think</a:t>
             </a:r>
@@ -12627,9 +12627,9 @@
             <a:r>
               <a:rPr sz="2800" b="0">
                 <a:solidFill>
-                  <a:srgbClr val="20190F"/>
-                </a:solidFill>
-                <a:latin typeface="Arial"/>
+                  <a:srgbClr val="111111"/>
+                </a:solidFill>
+                <a:latin typeface="Verdana"/>
               </a:rPr>
               <a:t>•  Ask a person to decide</a:t>
             </a:r>
@@ -12643,9 +12643,9 @@
             <a:r>
               <a:rPr sz="2800" b="0">
                 <a:solidFill>
-                  <a:srgbClr val="20190F"/>
-                </a:solidFill>
-                <a:latin typeface="Arial"/>
+                  <a:srgbClr val="111111"/>
+                </a:solidFill>
+                <a:latin typeface="Verdana"/>
               </a:rPr>
               <a:t>•  Check before you trust</a:t>
             </a:r>
@@ -12667,11 +12667,11 @@
             <a:avLst/>
           </a:prstGeom>
           <a:solidFill>
-            <a:srgbClr val="FBF6EC"/>
+            <a:srgbClr val="FFFFFF"/>
           </a:solidFill>
           <a:ln w="15875">
             <a:solidFill>
-              <a:srgbClr val="E2D8C4"/>
+              <a:srgbClr val="D6336C"/>
             </a:solidFill>
           </a:ln>
           <a:effectLst/>
@@ -12728,9 +12728,9 @@
             <a:r>
               <a:rPr sz="1200" b="1">
                 <a:solidFill>
-                  <a:srgbClr val="C07A1E"/>
-                </a:solidFill>
-                <a:latin typeface="Arial"/>
+                  <a:srgbClr val="1FA3C8"/>
+                </a:solidFill>
+                <a:latin typeface="Verdana"/>
               </a:rPr>
               <a:t>IMAGE · A-IMG-12 · coming</a:t>
             </a:r>
@@ -12767,9 +12767,9 @@
             <a:r>
               <a:rPr sz="1800" b="1">
                 <a:solidFill>
-                  <a:srgbClr val="1F4D2B"/>
-                </a:solidFill>
-                <a:latin typeface="Georgia"/>
+                  <a:srgbClr val="111111"/>
+                </a:solidFill>
+                <a:latin typeface="Impact"/>
               </a:rPr>
               <a:t>Certificate day</a:t>
             </a:r>
@@ -12806,9 +12806,9 @@
             <a:r>
               <a:rPr sz="1100" b="0">
                 <a:solidFill>
-                  <a:srgbClr val="20190F"/>
-                </a:solidFill>
-                <a:latin typeface="Arial"/>
+                  <a:srgbClr val="111111"/>
+                </a:solidFill>
+                <a:latin typeface="Verdana"/>
               </a:rPr>
               <a:t>Landscape 16:9. A facilitator shakes hands with a proud gogo holding a certificate (blank paper with a simple border and a seal shape, no text); a youth beside her claps; other learners in a semicircle holding their own. Posters on the wall behind (shapes only).</a:t>
             </a:r>
@@ -12829,7 +12829,7 @@
     <p:bg>
       <p:bgPr>
         <a:solidFill>
-          <a:srgbClr val="F7F2E9"/>
+          <a:srgbClr val="FFFFFF"/>
         </a:solidFill>
         <a:effectLst/>
       </p:bgPr>
@@ -12871,9 +12871,9 @@
             <a:r>
               <a:rPr sz="1000" b="0">
                 <a:solidFill>
-                  <a:srgbClr val="6B6255"/>
-                </a:solidFill>
-                <a:latin typeface="Arial"/>
+                  <a:srgbClr val="111111"/>
+                </a:solidFill>
+                <a:latin typeface="Verdana"/>
               </a:rPr>
               <a:t>A-D2-03   ·   Poster A-P07</a:t>
             </a:r>
@@ -12910,9 +12910,9 @@
             <a:r>
               <a:rPr sz="1000" b="0">
                 <a:solidFill>
-                  <a:srgbClr val="6B6255"/>
-                </a:solidFill>
-                <a:latin typeface="Arial"/>
+                  <a:srgbClr val="111111"/>
+                </a:solidFill>
+                <a:latin typeface="Verdana"/>
               </a:rPr>
               <a:t>AI Literacy</a:t>
             </a:r>
@@ -12949,9 +12949,9 @@
             <a:r>
               <a:rPr sz="3800" b="1">
                 <a:solidFill>
-                  <a:srgbClr val="1F4D2B"/>
-                </a:solidFill>
-                <a:latin typeface="Georgia"/>
+                  <a:srgbClr val="111111"/>
+                </a:solidFill>
+                <a:latin typeface="Impact"/>
               </a:rPr>
               <a:t>The Check Ladder</a:t>
             </a:r>
@@ -12973,7 +12973,7 @@
             <a:avLst/>
           </a:prstGeom>
           <a:solidFill>
-            <a:srgbClr val="E2D8C4"/>
+            <a:srgbClr val="D6336C"/>
           </a:solidFill>
           <a:ln>
             <a:noFill/>
@@ -13032,9 +13032,9 @@
             <a:r>
               <a:rPr sz="2800" b="0">
                 <a:solidFill>
-                  <a:srgbClr val="20190F"/>
-                </a:solidFill>
-                <a:latin typeface="Arial"/>
+                  <a:srgbClr val="111111"/>
+                </a:solidFill>
+                <a:latin typeface="Verdana"/>
               </a:rPr>
               <a:t>•  Makes sense here? · Ask again</a:t>
             </a:r>
@@ -13048,9 +13048,9 @@
             <a:r>
               <a:rPr sz="2800" b="0">
                 <a:solidFill>
-                  <a:srgbClr val="20190F"/>
-                </a:solidFill>
-                <a:latin typeface="Arial"/>
+                  <a:srgbClr val="111111"/>
+                </a:solidFill>
+                <a:latin typeface="Verdana"/>
               </a:rPr>
               <a:t>•  Second source · Ask a person</a:t>
             </a:r>
@@ -13064,9 +13064,9 @@
             <a:r>
               <a:rPr sz="2800" b="0">
                 <a:solidFill>
-                  <a:srgbClr val="20190F"/>
-                </a:solidFill>
-                <a:latin typeface="Arial"/>
+                  <a:srgbClr val="111111"/>
+                </a:solidFill>
+                <a:latin typeface="Verdana"/>
               </a:rPr>
               <a:t>•  Try it small</a:t>
             </a:r>
@@ -13088,11 +13088,11 @@
             <a:avLst/>
           </a:prstGeom>
           <a:solidFill>
-            <a:srgbClr val="FBF6EC"/>
+            <a:srgbClr val="FFFFFF"/>
           </a:solidFill>
           <a:ln w="15875">
             <a:solidFill>
-              <a:srgbClr val="E2D8C4"/>
+              <a:srgbClr val="D6336C"/>
             </a:solidFill>
           </a:ln>
           <a:effectLst/>
@@ -13149,9 +13149,9 @@
             <a:r>
               <a:rPr sz="1200" b="1">
                 <a:solidFill>
-                  <a:srgbClr val="C07A1E"/>
-                </a:solidFill>
-                <a:latin typeface="Arial"/>
+                  <a:srgbClr val="1FA3C8"/>
+                </a:solidFill>
+                <a:latin typeface="Verdana"/>
               </a:rPr>
               <a:t>POSTER ART · A-P07-ART · coming</a:t>
             </a:r>
@@ -13188,9 +13188,9 @@
             <a:r>
               <a:rPr sz="1800" b="1">
                 <a:solidFill>
-                  <a:srgbClr val="1F4D2B"/>
-                </a:solidFill>
-                <a:latin typeface="Georgia"/>
+                  <a:srgbClr val="111111"/>
+                </a:solidFill>
+                <a:latin typeface="Impact"/>
               </a:rPr>
               <a:t>Artwork for A-P07 · The Check Ladder</a:t>
             </a:r>
@@ -13227,9 +13227,9 @@
             <a:r>
               <a:rPr sz="1100" b="0">
                 <a:solidFill>
-                  <a:srgbClr val="20190F"/>
-                </a:solidFill>
-                <a:latin typeface="Arial"/>
+                  <a:srgbClr val="111111"/>
+                </a:solidFill>
+                <a:latin typeface="Verdana"/>
               </a:rPr>
               <a:t>A wooden ladder leaning against a water tank, five rungs. A farmer (woman, 40s, headscarf, gumboots) climbs it holding a phone. Beside each rung, a small picture: bottom rung — the farmer's own garden with the sun in the north (does it make sense here?); second — a circular arrow around a speech bubble (ask again); third — a seed packet and a product…</a:t>
             </a:r>
@@ -13250,7 +13250,7 @@
     <p:bg>
       <p:bgPr>
         <a:solidFill>
-          <a:srgbClr val="F7F2E9"/>
+          <a:srgbClr val="FFFFFF"/>
         </a:solidFill>
         <a:effectLst/>
       </p:bgPr>
@@ -13292,9 +13292,9 @@
             <a:r>
               <a:rPr sz="1000" b="0">
                 <a:solidFill>
-                  <a:srgbClr val="6B6255"/>
-                </a:solidFill>
-                <a:latin typeface="Arial"/>
+                  <a:srgbClr val="111111"/>
+                </a:solidFill>
+                <a:latin typeface="Verdana"/>
               </a:rPr>
               <a:t>A-D2-04   ·   Poster A-P08</a:t>
             </a:r>
@@ -13331,9 +13331,9 @@
             <a:r>
               <a:rPr sz="1000" b="0">
                 <a:solidFill>
-                  <a:srgbClr val="6B6255"/>
-                </a:solidFill>
-                <a:latin typeface="Arial"/>
+                  <a:srgbClr val="111111"/>
+                </a:solidFill>
+                <a:latin typeface="Verdana"/>
               </a:rPr>
               <a:t>AI Literacy</a:t>
             </a:r>
@@ -13370,9 +13370,9 @@
             <a:r>
               <a:rPr sz="3800" b="1">
                 <a:solidFill>
-                  <a:srgbClr val="1F4D2B"/>
-                </a:solidFill>
-                <a:latin typeface="Georgia"/>
+                  <a:srgbClr val="111111"/>
+                </a:solidFill>
+                <a:latin typeface="Impact"/>
               </a:rPr>
               <a:t>How bad if it's wrong?</a:t>
             </a:r>
@@ -13394,7 +13394,7 @@
             <a:avLst/>
           </a:prstGeom>
           <a:solidFill>
-            <a:srgbClr val="E2D8C4"/>
+            <a:srgbClr val="D6336C"/>
           </a:solidFill>
           <a:ln>
             <a:noFill/>
@@ -13453,9 +13453,9 @@
             <a:r>
               <a:rPr sz="2800" b="0">
                 <a:solidFill>
-                  <a:srgbClr val="20190F"/>
-                </a:solidFill>
-                <a:latin typeface="Arial"/>
+                  <a:srgbClr val="111111"/>
+                </a:solidFill>
+                <a:latin typeface="Verdana"/>
               </a:rPr>
               <a:t>•  Green: try small</a:t>
             </a:r>
@@ -13469,9 +13469,9 @@
             <a:r>
               <a:rPr sz="2800" b="0">
                 <a:solidFill>
-                  <a:srgbClr val="20190F"/>
-                </a:solidFill>
-                <a:latin typeface="Arial"/>
+                  <a:srgbClr val="111111"/>
+                </a:solidFill>
+                <a:latin typeface="Verdana"/>
               </a:rPr>
               <a:t>•  Orange: check a second source</a:t>
             </a:r>
@@ -13485,9 +13485,9 @@
             <a:r>
               <a:rPr sz="2800" b="0">
                 <a:solidFill>
-                  <a:srgbClr val="20190F"/>
-                </a:solidFill>
-                <a:latin typeface="Arial"/>
+                  <a:srgbClr val="111111"/>
+                </a:solidFill>
+                <a:latin typeface="Verdana"/>
               </a:rPr>
               <a:t>•  Red: always ask a person</a:t>
             </a:r>
@@ -13509,11 +13509,11 @@
             <a:avLst/>
           </a:prstGeom>
           <a:solidFill>
-            <a:srgbClr val="FBF6EC"/>
+            <a:srgbClr val="FFFFFF"/>
           </a:solidFill>
           <a:ln w="15875">
             <a:solidFill>
-              <a:srgbClr val="E2D8C4"/>
+              <a:srgbClr val="D6336C"/>
             </a:solidFill>
           </a:ln>
           <a:effectLst/>
@@ -13570,9 +13570,9 @@
             <a:r>
               <a:rPr sz="1200" b="1">
                 <a:solidFill>
-                  <a:srgbClr val="C07A1E"/>
-                </a:solidFill>
-                <a:latin typeface="Arial"/>
+                  <a:srgbClr val="1FA3C8"/>
+                </a:solidFill>
+                <a:latin typeface="Verdana"/>
               </a:rPr>
               <a:t>POSTER ART · A-P08-ART · coming</a:t>
             </a:r>
@@ -13609,9 +13609,9 @@
             <a:r>
               <a:rPr sz="1800" b="1">
                 <a:solidFill>
-                  <a:srgbClr val="1F4D2B"/>
-                </a:solidFill>
-                <a:latin typeface="Georgia"/>
+                  <a:srgbClr val="111111"/>
+                </a:solidFill>
+                <a:latin typeface="Impact"/>
               </a:rPr>
               <a:t>Artwork for A-P08 · Green · Orange · Red questions</a:t>
             </a:r>
@@ -13648,9 +13648,9 @@
             <a:r>
               <a:rPr sz="1100" b="0">
                 <a:solidFill>
-                  <a:srgbClr val="20190F"/>
-                </a:solidFill>
-                <a:latin typeface="Arial"/>
+                  <a:srgbClr val="111111"/>
+                </a:solidFill>
+                <a:latin typeface="Verdana"/>
               </a:rPr>
               <a:t>Three stacked panels like a traffic light, each also marked with a shape so it works in black and white: **green circle** panel — a pot of food cooking and a seed packet (low harm); **orange triangle** panel — a bed of wilting seedlings and a coin (could cost a crop or money); **red square** panel — a spray bottle, a medicine bottle, a goat lying down,…</a:t>
             </a:r>
@@ -13671,7 +13671,7 @@
     <p:bg>
       <p:bgPr>
         <a:solidFill>
-          <a:srgbClr val="F7F2E9"/>
+          <a:srgbClr val="FFFFFF"/>
         </a:solidFill>
         <a:effectLst/>
       </p:bgPr>
@@ -13713,9 +13713,9 @@
             <a:r>
               <a:rPr sz="1000" b="0">
                 <a:solidFill>
-                  <a:srgbClr val="6B6255"/>
-                </a:solidFill>
-                <a:latin typeface="Arial"/>
+                  <a:srgbClr val="111111"/>
+                </a:solidFill>
+                <a:latin typeface="Verdana"/>
               </a:rPr>
               <a:t>A-D2-05   ·   Poster A-P07</a:t>
             </a:r>
@@ -13752,9 +13752,9 @@
             <a:r>
               <a:rPr sz="1000" b="0">
                 <a:solidFill>
-                  <a:srgbClr val="6B6255"/>
-                </a:solidFill>
-                <a:latin typeface="Arial"/>
+                  <a:srgbClr val="111111"/>
+                </a:solidFill>
+                <a:latin typeface="Verdana"/>
               </a:rPr>
               <a:t>AI Literacy</a:t>
             </a:r>
@@ -13776,7 +13776,7 @@
             <a:avLst/>
           </a:prstGeom>
           <a:solidFill>
-            <a:srgbClr val="C07A1E"/>
+            <a:srgbClr val="1FA3C8"/>
           </a:solidFill>
           <a:ln>
             <a:noFill/>
@@ -13835,9 +13835,9 @@
             <a:r>
               <a:rPr sz="1400" b="1">
                 <a:solidFill>
-                  <a:srgbClr val="F7F2E9"/>
-                </a:solidFill>
-                <a:latin typeface="Arial"/>
+                  <a:srgbClr val="FFFFFF"/>
+                </a:solidFill>
+                <a:latin typeface="Verdana"/>
               </a:rPr>
               <a:t>YOUR TURN</a:t>
             </a:r>
@@ -13874,9 +13874,9 @@
             <a:r>
               <a:rPr sz="3800" b="1">
                 <a:solidFill>
-                  <a:srgbClr val="1F4D2B"/>
-                </a:solidFill>
-                <a:latin typeface="Georgia"/>
+                  <a:srgbClr val="111111"/>
+                </a:solidFill>
+                <a:latin typeface="Impact"/>
               </a:rPr>
               <a:t>Find the mistakes</a:t>
             </a:r>
@@ -13898,7 +13898,7 @@
             <a:avLst/>
           </a:prstGeom>
           <a:solidFill>
-            <a:srgbClr val="E2D8C4"/>
+            <a:srgbClr val="D6336C"/>
           </a:solidFill>
           <a:ln>
             <a:noFill/>
@@ -13957,9 +13957,9 @@
             <a:r>
               <a:rPr sz="2600" b="1">
                 <a:solidFill>
-                  <a:srgbClr val="20190F"/>
-                </a:solidFill>
-                <a:latin typeface="Arial"/>
+                  <a:srgbClr val="111111"/>
+                </a:solidFill>
+                <a:latin typeface="Verdana"/>
               </a:rPr>
               <a:t>•  4 AI answer cards per group</a:t>
             </a:r>
@@ -13973,9 +13973,9 @@
             <a:r>
               <a:rPr sz="2600" b="1">
                 <a:solidFill>
-                  <a:srgbClr val="20190F"/>
-                </a:solidFill>
-                <a:latin typeface="Arial"/>
+                  <a:srgbClr val="111111"/>
+                </a:solidFill>
+                <a:latin typeface="Verdana"/>
               </a:rPr>
               <a:t>•  Circle the mistake · give a colour</a:t>
             </a:r>
@@ -13989,9 +13989,9 @@
             <a:r>
               <a:rPr sz="2600" b="1">
                 <a:solidFill>
-                  <a:srgbClr val="20190F"/>
-                </a:solidFill>
-                <a:latin typeface="Arial"/>
+                  <a:srgbClr val="111111"/>
+                </a:solidFill>
+                <a:latin typeface="Verdana"/>
               </a:rPr>
               <a:t>•  Who would you ask?</a:t>
             </a:r>
@@ -14013,11 +14013,11 @@
             <a:avLst/>
           </a:prstGeom>
           <a:solidFill>
-            <a:srgbClr val="FBF6EC"/>
+            <a:srgbClr val="FFFFFF"/>
           </a:solidFill>
           <a:ln w="15875">
             <a:solidFill>
-              <a:srgbClr val="E2D8C4"/>
+              <a:srgbClr val="D6336C"/>
             </a:solidFill>
           </a:ln>
           <a:effectLst/>
@@ -14074,9 +14074,9 @@
             <a:r>
               <a:rPr sz="1200" b="1">
                 <a:solidFill>
-                  <a:srgbClr val="C07A1E"/>
-                </a:solidFill>
-                <a:latin typeface="Arial"/>
+                  <a:srgbClr val="1FA3C8"/>
+                </a:solidFill>
+                <a:latin typeface="Verdana"/>
               </a:rPr>
               <a:t>IMAGE · A-IMG-05 · coming</a:t>
             </a:r>
@@ -14113,9 +14113,9 @@
             <a:r>
               <a:rPr sz="1800" b="1">
                 <a:solidFill>
-                  <a:srgbClr val="1F4D2B"/>
-                </a:solidFill>
-                <a:latin typeface="Georgia"/>
+                  <a:srgbClr val="111111"/>
+                </a:solidFill>
+                <a:latin typeface="Impact"/>
               </a:rPr>
               <a:t>The AI desk (facilitator plays the machine)</a:t>
             </a:r>
@@ -14152,9 +14152,9 @@
             <a:r>
               <a:rPr sz="1100" b="0">
                 <a:solidFill>
-                  <a:srgbClr val="20190F"/>
-                </a:solidFill>
-                <a:latin typeface="Arial"/>
+                  <a:srgbClr val="111111"/>
+                </a:solidFill>
+                <a:latin typeface="Verdana"/>
               </a:rPr>
               <a:t>Landscape 16:9. A facilitator (woman, 30s) sits on a chair at the side of a hall wearing a large card on a string round her neck — the card shows a simple drawn phone with a question mark (a drawing, not words). She holds a small stack of cards and reads one in a deadpan, confident way. A group Reporter (young man) stands in front of her with a notebook;…</a:t>
             </a:r>
@@ -14175,7 +14175,7 @@
     <p:bg>
       <p:bgPr>
         <a:solidFill>
-          <a:srgbClr val="F7F2E9"/>
+          <a:srgbClr val="FFFFFF"/>
         </a:solidFill>
         <a:effectLst/>
       </p:bgPr>
@@ -14217,9 +14217,9 @@
             <a:r>
               <a:rPr sz="1000" b="0">
                 <a:solidFill>
-                  <a:srgbClr val="6B6255"/>
-                </a:solidFill>
-                <a:latin typeface="Arial"/>
+                  <a:srgbClr val="111111"/>
+                </a:solidFill>
+                <a:latin typeface="Verdana"/>
               </a:rPr>
               <a:t>A-D2-06   ·   Poster A-P07</a:t>
             </a:r>
@@ -14256,9 +14256,9 @@
             <a:r>
               <a:rPr sz="1000" b="0">
                 <a:solidFill>
-                  <a:srgbClr val="6B6255"/>
-                </a:solidFill>
-                <a:latin typeface="Arial"/>
+                  <a:srgbClr val="111111"/>
+                </a:solidFill>
+                <a:latin typeface="Verdana"/>
               </a:rPr>
               <a:t>AI Literacy</a:t>
             </a:r>
@@ -14280,7 +14280,7 @@
             <a:avLst/>
           </a:prstGeom>
           <a:solidFill>
-            <a:srgbClr val="C07A1E"/>
+            <a:srgbClr val="1FA3C8"/>
           </a:solidFill>
           <a:ln>
             <a:noFill/>
@@ -14339,9 +14339,9 @@
             <a:r>
               <a:rPr sz="1400" b="1">
                 <a:solidFill>
-                  <a:srgbClr val="F7F2E9"/>
-                </a:solidFill>
-                <a:latin typeface="Arial"/>
+                  <a:srgbClr val="FFFFFF"/>
+                </a:solidFill>
+                <a:latin typeface="Verdana"/>
               </a:rPr>
               <a:t>YOUR TURN</a:t>
             </a:r>
@@ -14378,9 +14378,9 @@
             <a:r>
               <a:rPr sz="3800" b="1">
                 <a:solidFill>
-                  <a:srgbClr val="1F4D2B"/>
-                </a:solidFill>
-                <a:latin typeface="Georgia"/>
+                  <a:srgbClr val="111111"/>
+                </a:solidFill>
+                <a:latin typeface="Impact"/>
               </a:rPr>
               <a:t>Check my own answer</a:t>
             </a:r>
@@ -14402,7 +14402,7 @@
             <a:avLst/>
           </a:prstGeom>
           <a:solidFill>
-            <a:srgbClr val="E2D8C4"/>
+            <a:srgbClr val="D6336C"/>
           </a:solidFill>
           <a:ln>
             <a:noFill/>
@@ -14461,9 +14461,9 @@
             <a:r>
               <a:rPr sz="2600" b="1">
                 <a:solidFill>
-                  <a:srgbClr val="20190F"/>
-                </a:solidFill>
-                <a:latin typeface="Arial"/>
+                  <a:srgbClr val="111111"/>
+                </a:solidFill>
+                <a:latin typeface="Verdana"/>
               </a:rPr>
               <a:t>•  Yesterday's card: makes sense here?</a:t>
             </a:r>
@@ -14477,9 +14477,9 @@
             <a:r>
               <a:rPr sz="2600" b="1">
                 <a:solidFill>
-                  <a:srgbClr val="20190F"/>
-                </a:solidFill>
-                <a:latin typeface="Arial"/>
+                  <a:srgbClr val="111111"/>
+                </a:solidFill>
+                <a:latin typeface="Verdana"/>
               </a:rPr>
               <a:t>•  What colour now?</a:t>
             </a:r>
@@ -14493,9 +14493,9 @@
             <a:r>
               <a:rPr sz="2600" b="1">
                 <a:solidFill>
-                  <a:srgbClr val="20190F"/>
-                </a:solidFill>
-                <a:latin typeface="Arial"/>
+                  <a:srgbClr val="111111"/>
+                </a:solidFill>
+                <a:latin typeface="Verdana"/>
               </a:rPr>
               <a:t>•  Write who you will ask</a:t>
             </a:r>
@@ -14517,11 +14517,11 @@
             <a:avLst/>
           </a:prstGeom>
           <a:solidFill>
-            <a:srgbClr val="FBF6EC"/>
+            <a:srgbClr val="FFFFFF"/>
           </a:solidFill>
           <a:ln w="15875">
             <a:solidFill>
-              <a:srgbClr val="E2D8C4"/>
+              <a:srgbClr val="D6336C"/>
             </a:solidFill>
           </a:ln>
           <a:effectLst/>
@@ -14578,9 +14578,9 @@
             <a:r>
               <a:rPr sz="1200" b="1">
                 <a:solidFill>
-                  <a:srgbClr val="C07A1E"/>
-                </a:solidFill>
-                <a:latin typeface="Arial"/>
+                  <a:srgbClr val="1FA3C8"/>
+                </a:solidFill>
+                <a:latin typeface="Verdana"/>
               </a:rPr>
               <a:t>POSTER ART · A-P07-ART · coming</a:t>
             </a:r>
@@ -14617,9 +14617,9 @@
             <a:r>
               <a:rPr sz="1800" b="1">
                 <a:solidFill>
-                  <a:srgbClr val="1F4D2B"/>
-                </a:solidFill>
-                <a:latin typeface="Georgia"/>
+                  <a:srgbClr val="111111"/>
+                </a:solidFill>
+                <a:latin typeface="Impact"/>
               </a:rPr>
               <a:t>Artwork for A-P07 · The Check Ladder</a:t>
             </a:r>
@@ -14656,9 +14656,9 @@
             <a:r>
               <a:rPr sz="1100" b="0">
                 <a:solidFill>
-                  <a:srgbClr val="20190F"/>
-                </a:solidFill>
-                <a:latin typeface="Arial"/>
+                  <a:srgbClr val="111111"/>
+                </a:solidFill>
+                <a:latin typeface="Verdana"/>
               </a:rPr>
               <a:t>A wooden ladder leaning against a water tank, five rungs. A farmer (woman, 40s, headscarf, gumboots) climbs it holding a phone. Beside each rung, a small picture: bottom rung — the farmer's own garden with the sun in the north (does it make sense here?); second — a circular arrow around a speech bubble (ask again); third — a seed packet and a product…</a:t>
             </a:r>
@@ -14679,7 +14679,7 @@
     <p:bg>
       <p:bgPr>
         <a:solidFill>
-          <a:srgbClr val="1F4D2B"/>
+          <a:srgbClr val="1B1F3B"/>
         </a:solidFill>
         <a:effectLst/>
       </p:bgPr>
@@ -14721,9 +14721,9 @@
             <a:r>
               <a:rPr sz="1000" b="0">
                 <a:solidFill>
-                  <a:srgbClr val="A8D88A"/>
-                </a:solidFill>
-                <a:latin typeface="Arial"/>
+                  <a:srgbClr val="F7C948"/>
+                </a:solidFill>
+                <a:latin typeface="Verdana"/>
               </a:rPr>
               <a:t>A-D2-07   ·   Poster A-P09</a:t>
             </a:r>
@@ -14760,9 +14760,9 @@
             <a:r>
               <a:rPr sz="1000" b="0">
                 <a:solidFill>
-                  <a:srgbClr val="A8D88A"/>
-                </a:solidFill>
-                <a:latin typeface="Arial"/>
+                  <a:srgbClr val="F7C948"/>
+                </a:solidFill>
+                <a:latin typeface="Verdana"/>
               </a:rPr>
               <a:t>AI Literacy</a:t>
             </a:r>
@@ -14799,9 +14799,9 @@
             <a:r>
               <a:rPr sz="4800" b="1">
                 <a:solidFill>
-                  <a:srgbClr val="F7F2E9"/>
-                </a:solidFill>
-                <a:latin typeface="Georgia"/>
+                  <a:srgbClr val="F7C948"/>
+                </a:solidFill>
+                <a:latin typeface="Impact"/>
               </a:rPr>
               <a:t>Keep yourself safe</a:t>
             </a:r>
@@ -14823,7 +14823,7 @@
             <a:avLst/>
           </a:prstGeom>
           <a:solidFill>
-            <a:srgbClr val="C07A1E"/>
+            <a:srgbClr val="1FA3C8"/>
           </a:solidFill>
           <a:ln>
             <a:noFill/>
@@ -14882,9 +14882,9 @@
             <a:r>
               <a:rPr sz="2400" b="0">
                 <a:solidFill>
-                  <a:srgbClr val="A8D88A"/>
-                </a:solidFill>
-                <a:latin typeface="Arial"/>
+                  <a:srgbClr val="F7C948"/>
+                </a:solidFill>
+                <a:latin typeface="Verdana"/>
               </a:rPr>
               <a:t>Your phone is your wallet</a:t>
             </a:r>
@@ -14906,11 +14906,11 @@
             <a:avLst/>
           </a:prstGeom>
           <a:solidFill>
-            <a:srgbClr val="FBF6EC"/>
+            <a:srgbClr val="FFFFFF"/>
           </a:solidFill>
           <a:ln w="15875">
             <a:solidFill>
-              <a:srgbClr val="E2D8C4"/>
+              <a:srgbClr val="D6336C"/>
             </a:solidFill>
           </a:ln>
           <a:effectLst/>
@@ -14967,9 +14967,9 @@
             <a:r>
               <a:rPr sz="1200" b="1">
                 <a:solidFill>
-                  <a:srgbClr val="C07A1E"/>
-                </a:solidFill>
-                <a:latin typeface="Arial"/>
+                  <a:srgbClr val="1FA3C8"/>
+                </a:solidFill>
+                <a:latin typeface="Verdana"/>
               </a:rPr>
               <a:t>POSTER ART · A-P09-ART · coming</a:t>
             </a:r>
@@ -15006,9 +15006,9 @@
             <a:r>
               <a:rPr sz="1800" b="1">
                 <a:solidFill>
-                  <a:srgbClr val="1F4D2B"/>
-                </a:solidFill>
-                <a:latin typeface="Georgia"/>
+                  <a:srgbClr val="111111"/>
+                </a:solidFill>
+                <a:latin typeface="Impact"/>
               </a:rPr>
               <a:t>Artwork for A-P09 · Keep it private</a:t>
             </a:r>
@@ -15045,9 +15045,9 @@
             <a:r>
               <a:rPr sz="1100" b="0">
                 <a:solidFill>
-                  <a:srgbClr val="20190F"/>
-                </a:solidFill>
-                <a:latin typeface="Arial"/>
+                  <a:srgbClr val="111111"/>
+                </a:solidFill>
+                <a:latin typeface="Verdana"/>
               </a:rPr>
               <a:t>A phone drawn as an open wallet/purse. Inside it, six items each with a closed padlock: ① an ID book/card (green SA-style ID shape, no text, no crest), ② a bank card with a keypad beside it, ③ a phone screen showing six blank boxes (a code), ④ a plain grant card (no logo), ⑤ a framed photo of two children (faces drawn as simple shapes, turned away), ⑥ a…</a:t>
             </a:r>
@@ -15068,7 +15068,7 @@
     <p:bg>
       <p:bgPr>
         <a:solidFill>
-          <a:srgbClr val="F7F2E9"/>
+          <a:srgbClr val="FFFFFF"/>
         </a:solidFill>
         <a:effectLst/>
       </p:bgPr>
@@ -15110,9 +15110,9 @@
             <a:r>
               <a:rPr sz="1000" b="0">
                 <a:solidFill>
-                  <a:srgbClr val="6B6255"/>
-                </a:solidFill>
-                <a:latin typeface="Arial"/>
+                  <a:srgbClr val="111111"/>
+                </a:solidFill>
+                <a:latin typeface="Verdana"/>
               </a:rPr>
               <a:t>A-D2-08   ·   Poster A-P09</a:t>
             </a:r>
@@ -15149,9 +15149,9 @@
             <a:r>
               <a:rPr sz="1000" b="0">
                 <a:solidFill>
-                  <a:srgbClr val="6B6255"/>
-                </a:solidFill>
-                <a:latin typeface="Arial"/>
+                  <a:srgbClr val="111111"/>
+                </a:solidFill>
+                <a:latin typeface="Verdana"/>
               </a:rPr>
               <a:t>AI Literacy</a:t>
             </a:r>
@@ -15188,9 +15188,9 @@
             <a:r>
               <a:rPr sz="3800" b="1">
                 <a:solidFill>
-                  <a:srgbClr val="1F4D2B"/>
-                </a:solidFill>
-                <a:latin typeface="Georgia"/>
+                  <a:srgbClr val="111111"/>
+                </a:solidFill>
+                <a:latin typeface="Impact"/>
               </a:rPr>
               <a:t>Never share</a:t>
             </a:r>
@@ -15212,7 +15212,7 @@
             <a:avLst/>
           </a:prstGeom>
           <a:solidFill>
-            <a:srgbClr val="E2D8C4"/>
+            <a:srgbClr val="D6336C"/>
           </a:solidFill>
           <a:ln>
             <a:noFill/>
@@ -15271,9 +15271,9 @@
             <a:r>
               <a:rPr sz="2400" b="0">
                 <a:solidFill>
-                  <a:srgbClr val="20190F"/>
-                </a:solidFill>
-                <a:latin typeface="Arial"/>
+                  <a:srgbClr val="111111"/>
+                </a:solidFill>
+                <a:latin typeface="Verdana"/>
               </a:rPr>
               <a:t>•  ID · bank card &amp; PIN · codes</a:t>
             </a:r>
@@ -15287,9 +15287,9 @@
             <a:r>
               <a:rPr sz="2400" b="0">
                 <a:solidFill>
-                  <a:srgbClr val="20190F"/>
-                </a:solidFill>
-                <a:latin typeface="Arial"/>
+                  <a:srgbClr val="111111"/>
+                </a:solidFill>
+                <a:latin typeface="Verdana"/>
               </a:rPr>
               <a:t>•  Grant details · children's faces</a:t>
             </a:r>
@@ -15303,9 +15303,9 @@
             <a:r>
               <a:rPr sz="2400" b="0">
                 <a:solidFill>
-                  <a:srgbClr val="20190F"/>
-                </a:solidFill>
-                <a:latin typeface="Arial"/>
+                  <a:srgbClr val="111111"/>
+                </a:solidFill>
+                <a:latin typeface="Verdana"/>
               </a:rPr>
               <a:t>•  Where you are — with strangers</a:t>
             </a:r>
@@ -15327,11 +15327,11 @@
             <a:avLst/>
           </a:prstGeom>
           <a:solidFill>
-            <a:srgbClr val="FBF6EC"/>
+            <a:srgbClr val="FFFFFF"/>
           </a:solidFill>
           <a:ln w="15875">
             <a:solidFill>
-              <a:srgbClr val="E2D8C4"/>
+              <a:srgbClr val="D6336C"/>
             </a:solidFill>
           </a:ln>
           <a:effectLst/>
@@ -15388,9 +15388,9 @@
             <a:r>
               <a:rPr sz="1200" b="1">
                 <a:solidFill>
-                  <a:srgbClr val="C07A1E"/>
-                </a:solidFill>
-                <a:latin typeface="Arial"/>
+                  <a:srgbClr val="1FA3C8"/>
+                </a:solidFill>
+                <a:latin typeface="Verdana"/>
               </a:rPr>
               <a:t>POSTER ART · A-P09-ART · coming</a:t>
             </a:r>
@@ -15427,9 +15427,9 @@
             <a:r>
               <a:rPr sz="1800" b="1">
                 <a:solidFill>
-                  <a:srgbClr val="1F4D2B"/>
-                </a:solidFill>
-                <a:latin typeface="Georgia"/>
+                  <a:srgbClr val="111111"/>
+                </a:solidFill>
+                <a:latin typeface="Impact"/>
               </a:rPr>
               <a:t>Artwork for A-P09 · Keep it private</a:t>
             </a:r>
@@ -15466,9 +15466,9 @@
             <a:r>
               <a:rPr sz="1100" b="0">
                 <a:solidFill>
-                  <a:srgbClr val="20190F"/>
-                </a:solidFill>
-                <a:latin typeface="Arial"/>
+                  <a:srgbClr val="111111"/>
+                </a:solidFill>
+                <a:latin typeface="Verdana"/>
               </a:rPr>
               <a:t>A phone drawn as an open wallet/purse. Inside it, six items each with a closed padlock: ① an ID book/card (green SA-style ID shape, no text, no crest), ② a bank card with a keypad beside it, ③ a phone screen showing six blank boxes (a code), ④ a plain grant card (no logo), ⑤ a framed photo of two children (faces drawn as simple shapes, turned away), ⑥ a…</a:t>
             </a:r>
@@ -15489,7 +15489,7 @@
     <p:bg>
       <p:bgPr>
         <a:solidFill>
-          <a:srgbClr val="F7F2E9"/>
+          <a:srgbClr val="FFFFFF"/>
         </a:solidFill>
         <a:effectLst/>
       </p:bgPr>
@@ -15531,9 +15531,9 @@
             <a:r>
               <a:rPr sz="1000" b="0">
                 <a:solidFill>
-                  <a:srgbClr val="6B6255"/>
-                </a:solidFill>
-                <a:latin typeface="Arial"/>
+                  <a:srgbClr val="111111"/>
+                </a:solidFill>
+                <a:latin typeface="Verdana"/>
               </a:rPr>
               <a:t>A-D2-09   ·   Poster A-P09</a:t>
             </a:r>
@@ -15570,9 +15570,9 @@
             <a:r>
               <a:rPr sz="1000" b="0">
                 <a:solidFill>
-                  <a:srgbClr val="6B6255"/>
-                </a:solidFill>
-                <a:latin typeface="Arial"/>
+                  <a:srgbClr val="111111"/>
+                </a:solidFill>
+                <a:latin typeface="Verdana"/>
               </a:rPr>
               <a:t>AI Literacy</a:t>
             </a:r>
@@ -15594,7 +15594,7 @@
             <a:avLst/>
           </a:prstGeom>
           <a:solidFill>
-            <a:srgbClr val="C07A1E"/>
+            <a:srgbClr val="1FA3C8"/>
           </a:solidFill>
           <a:ln>
             <a:noFill/>
@@ -15653,9 +15653,9 @@
             <a:r>
               <a:rPr sz="1400" b="1">
                 <a:solidFill>
-                  <a:srgbClr val="F7F2E9"/>
-                </a:solidFill>
-                <a:latin typeface="Arial"/>
+                  <a:srgbClr val="FFFFFF"/>
+                </a:solidFill>
+                <a:latin typeface="Verdana"/>
               </a:rPr>
               <a:t>YOUR TURN</a:t>
             </a:r>
@@ -15692,9 +15692,9 @@
             <a:r>
               <a:rPr sz="3800" b="1">
                 <a:solidFill>
-                  <a:srgbClr val="1F4D2B"/>
-                </a:solidFill>
-                <a:latin typeface="Georgia"/>
+                  <a:srgbClr val="111111"/>
+                </a:solidFill>
+                <a:latin typeface="Impact"/>
               </a:rPr>
               <a:t>Share or not?</a:t>
             </a:r>
@@ -15716,7 +15716,7 @@
             <a:avLst/>
           </a:prstGeom>
           <a:solidFill>
-            <a:srgbClr val="E2D8C4"/>
+            <a:srgbClr val="D6336C"/>
           </a:solidFill>
           <a:ln>
             <a:noFill/>
@@ -15775,9 +15775,9 @@
             <a:r>
               <a:rPr sz="2600" b="1">
                 <a:solidFill>
-                  <a:srgbClr val="20190F"/>
-                </a:solidFill>
-                <a:latin typeface="Arial"/>
+                  <a:srgbClr val="111111"/>
+                </a:solidFill>
+                <a:latin typeface="Verdana"/>
               </a:rPr>
               <a:t>•  16 cards, 3 piles</a:t>
             </a:r>
@@ -15791,9 +15791,9 @@
             <a:r>
               <a:rPr sz="2600" b="1">
                 <a:solidFill>
-                  <a:srgbClr val="20190F"/>
-                </a:solidFill>
-                <a:latin typeface="Arial"/>
+                  <a:srgbClr val="111111"/>
+                </a:solidFill>
+                <a:latin typeface="Verdana"/>
               </a:rPr>
               <a:t>•  Fine · trusted face to face · never</a:t>
             </a:r>
@@ -15807,9 +15807,9 @@
             <a:r>
               <a:rPr sz="2600" b="1">
                 <a:solidFill>
-                  <a:srgbClr val="20190F"/>
-                </a:solidFill>
-                <a:latin typeface="Arial"/>
+                  <a:srgbClr val="111111"/>
+                </a:solidFill>
+                <a:latin typeface="Verdana"/>
               </a:rPr>
               <a:t>•  10 minutes</a:t>
             </a:r>
@@ -15831,11 +15831,11 @@
             <a:avLst/>
           </a:prstGeom>
           <a:solidFill>
-            <a:srgbClr val="FBF6EC"/>
+            <a:srgbClr val="FFFFFF"/>
           </a:solidFill>
           <a:ln w="15875">
             <a:solidFill>
-              <a:srgbClr val="E2D8C4"/>
+              <a:srgbClr val="D6336C"/>
             </a:solidFill>
           </a:ln>
           <a:effectLst/>
@@ -15892,9 +15892,9 @@
             <a:r>
               <a:rPr sz="1200" b="1">
                 <a:solidFill>
-                  <a:srgbClr val="C07A1E"/>
-                </a:solidFill>
-                <a:latin typeface="Arial"/>
+                  <a:srgbClr val="1FA3C8"/>
+                </a:solidFill>
+                <a:latin typeface="Verdana"/>
               </a:rPr>
               <a:t>IMAGE · A-IMG-06 · coming</a:t>
             </a:r>
@@ -15931,9 +15931,9 @@
             <a:r>
               <a:rPr sz="1800" b="1">
                 <a:solidFill>
-                  <a:srgbClr val="1F4D2B"/>
-                </a:solidFill>
-                <a:latin typeface="Georgia"/>
+                  <a:srgbClr val="111111"/>
+                </a:solidFill>
+                <a:latin typeface="Impact"/>
               </a:rPr>
               <a:t>Share or not — three piles</a:t>
             </a:r>
@@ -15970,9 +15970,9 @@
             <a:r>
               <a:rPr sz="1100" b="0">
                 <a:solidFill>
-                  <a:srgbClr val="20190F"/>
-                </a:solidFill>
-                <a:latin typeface="Arial"/>
+                  <a:srgbClr val="111111"/>
+                </a:solidFill>
+                <a:latin typeface="Verdana"/>
               </a:rPr>
               <a:t>Top-down view of a reed mat with three sheets: one with a green circle, one with an orange triangle, one with a red square. Hands of different ages place small cards (blank faces with small icons: an ID shape, a leaf, a padlock, a pin) onto the piles. No text.</a:t>
             </a:r>

--- a/courses/build/ai-literacy/A-D2.pptx
+++ b/courses/build/ai-literacy/A-D2.pptx
@@ -1380,7 +1380,7 @@
           </a:p>
           <a:p>
             <a:r>
-              <a:t>Clip A-ANI-07: public/course-animations/market-community/watch-04-farm-record.mp4</a:t>
+              <a:t>Clip A-ANI-07: public/course-media/ai-literacy/A-ANI-07.mp4</a:t>
             </a:r>
           </a:p>
         </p:txBody>
@@ -1557,7 +1557,7 @@
           </a:p>
           <a:p>
             <a:r>
-              <a:t>Clip A-ANI-06: public/course-animations/soil-health/tour-soil-observation.mp4</a:t>
+              <a:t>Clip A-ANI-06: public/course-media/ai-literacy/A-ANI-06.mp4</a:t>
             </a:r>
           </a:p>
         </p:txBody>
@@ -1906,7 +1906,7 @@
           </a:p>
           <a:p>
             <a:r>
-              <a:t>Clip A-ANI-05: public/course-animations/reading-landscape/watch-09-sun-shadows.mp4</a:t>
+              <a:t>Clip A-ANI-05: public/course-media/ai-literacy/A-ANI-05.mp4</a:t>
             </a:r>
           </a:p>
         </p:txBody>
